--- a/etap1/slajdy-etap1.pptx
+++ b/etap1/slajdy-etap1.pptx
@@ -19,7 +19,6 @@
     <p:sldId id="264" r:id="rId15"/>
     <p:sldId id="265" r:id="rId16"/>
     <p:sldId id="266" r:id="rId6"/>
-    <p:sldId id="267" r:id="rId5"/>
   </p:sldIdLst>
   <p:sldSz cx="12192000" cy="6858000"/>
   <p:notesSz cx="6858000" cy="9144000"/>
@@ -523,7 +522,7 @@
           <a:lstStyle/>
           <a:p>
             <a:r>
-              <a:t>Temat 06 z karty tematów. Odtwarzamy pytanie z pracy Kohaviego (1995) w adaptacji: własny generator danych i modele ze scikit-learn. Ok. 10 minut.</a:t>
+              <a:t>CO POWIEDZIEĆ (30 s): Temat 06 z obszaru „metodologia eksperymentów”. Publikacja: Kohavi, IJCAI 1995 — jedna z najczęściej cytowanych prac o walidacji krzyżowej. Pytanie projektu: jak liczba foldów k wpływa na obciążenie i zmienność błędu szacowanego przez CV i co zmienia stratyfikacja przy klasie rzadkiej. Plan prezentacji: publikacja → pytanie i hipotezy → teoria z przykładem ręcznym → plan badania → wykonalność.</a:t>
             </a:r>
           </a:p>
         </p:txBody>
@@ -593,7 +592,22 @@
           <a:lstStyle/>
           <a:p>
             <a:r>
-              <a:t>Mała próba potwierdza działający generator, kod i budżet. Pełna seria to sekundy — ryzykiem nie jest obliczenie, lecz poprawność protokołu.</a:t>
+              <a:t>CO POWIEDZIEĆ (1 min): Kontrakt wymaga na etapie 1 „małej próby uruchomienia”. Uruchomiliśmy cały potok na 3 zbiorach zamiast 30: 174 dopasowania w 0,16 s — pełna seria to 1080 (odtworzenie) + 660 (eksperyment własny) + 180 (etap 3: modele na 100/160/180 obiektach, żeby oddzielić wpływ rozmiaru treningu od losowego podziału) = 1920 ≤ 2500. Obliczenia nie są ryzykiem; ryzykiem jest poprawność protokołu.</a:t>
+            </a:r>
+          </a:p>
+          <a:p>
+            <a:r>
+              <a:t>Z próby NIE wyciągamy wniosków — służy do sprawdzenia kodu i do przykładu ręcznego.</a:t>
+            </a:r>
+          </a:p>
+          <a:p>
+            <a:r>
+              <a:t>Co zapisujemy (karta: „zachowaj wyniki wszystkich zaplanowanych uruchomień, błędy oraz powody brakujących wyników”): CSV per fold z błędem i składem klas, podsumowania per zbiór × model × k, meta.json z wersjami, ziarnami, liczbą dopasowań i czasem.</a:t>
+            </a:r>
+          </a:p>
+          <a:p>
+            <a:r>
+              <a:t>Kontrola poprawności — cztery zasady z karty: (1) duży test wyłącznie do oceny estymatora; (2) te same próbki dla wszystkich wariantów CV; (3) wszystko utrwalone przed badaniem w protocol.py; (4) brak przecieku — model w foldzie uczy się tylko na pozostałych foldach, T ma osobne ziarno, nie ma doboru hiperparametrów ani skalowania, więc nie ma kroku, który mógłby „podejrzeć” dane testowe.</a:t>
             </a:r>
           </a:p>
         </p:txBody>
@@ -663,77 +677,27 @@
           <a:lstStyle/>
           <a:p>
             <a:r>
-              <a:t>Praca autora (Kohavi): pytanie, definicje, schemat porównania. Nasz wkład: generator, protokół, kod, eksperyment własny.</a:t>
-            </a:r>
-          </a:p>
-        </p:txBody>
-      </p:sp>
-      <p:sp>
-        <p:nvSpPr>
-          <p:cNvPr id="4" name="Slide Number Placeholder 3"/>
-          <p:cNvSpPr>
-            <a:spLocks noGrp="1"/>
-          </p:cNvSpPr>
-          <p:nvPr>
-            <p:ph type="sldNum" idx="5" sz="quarter"/>
-          </p:nvPr>
-        </p:nvSpPr>
-        <p:spPr/>
-      </p:sp>
-    </p:spTree>
-  </p:cSld>
-  <p:clrMapOvr>
-    <a:masterClrMapping/>
-  </p:clrMapOvr>
-</p:notes>
-</file>
-
-<file path=ppt/notesSlides/notesSlide12.xml><?xml version="1.0" encoding="utf-8"?>
-<p:notes xmlns:a="http://schemas.openxmlformats.org/drawingml/2006/main" xmlns:p="http://schemas.openxmlformats.org/presentationml/2006/main" xmlns:r="http://schemas.openxmlformats.org/officeDocument/2006/relationships">
-  <p:cSld>
-    <p:spTree>
-      <p:nvGrpSpPr>
-        <p:cNvPr id="1" name=""/>
-        <p:cNvGrpSpPr/>
-        <p:nvPr/>
-      </p:nvGrpSpPr>
-      <p:grpSpPr>
-        <a:xfrm>
-          <a:off x="0" y="0"/>
-          <a:ext cx="0" cy="0"/>
-          <a:chOff x="0" y="0"/>
-          <a:chExt cx="0" cy="0"/>
-        </a:xfrm>
-      </p:grpSpPr>
-      <p:sp>
-        <p:nvSpPr>
-          <p:cNvPr id="2" name="Slide Image Placeholder 1"/>
-          <p:cNvSpPr>
-            <a:spLocks noGrp="1"/>
-          </p:cNvSpPr>
-          <p:nvPr>
-            <p:ph type="sldImg" idx="2"/>
-          </p:nvPr>
-        </p:nvSpPr>
-        <p:spPr/>
-      </p:sp>
-      <p:sp>
-        <p:nvSpPr>
-          <p:cNvPr id="3" name="Notes Placeholder 2"/>
-          <p:cNvSpPr>
-            <a:spLocks noGrp="1"/>
-          </p:cNvSpPr>
-          <p:nvPr>
-            <p:ph type="body" idx="3" sz="quarter"/>
-          </p:nvPr>
-        </p:nvSpPr>
-        <p:spPr/>
-        <p:txBody>
-          <a:bodyPr/>
-          <a:lstStyle/>
-          <a:p>
-            <a:r>
-              <a:t>Slajd na pytania po prezentacji.</a:t>
+              <a:t>CO POWIEDZIEĆ (1 min): Ograniczenia naszego planu: (1) dane syntetyczne o rozkładzie dokładnie zgodnym z założeniami GaussianNB — wyniki dla NB mogą być „zbyt ładne”; (2) jeden wspólny test T — wartości e_test z różnych zbiorów dzielą ten sam szum testu (ok. 0,4 p.p., pomijalny, ale odnotowany); (3) 30 powtórzeń → błąd standardowy obciążenia ≈ sd/√30, przy sd 3 p.p. to ≈ 0,5 p.p., więc obciążenie poniżej 1 p.p. (prawdopodobne dla NB) może być nieodróżnialne od zera — to też jest wynik, nie porażka.</a:t>
+            </a:r>
+          </a:p>
+          <a:p>
+            <a:r>
+              <a:t>Krytycznie o publikacji: „prawdziwa” trafność Kohaviego to też tylko estymata z holdoutu na reszcie zbioru; 50 próbek z tego samego skończonego zbioru nie jest w pełni niezależnych; jego Propozycja 1 (wariancja CV niezależna od k) wymaga stabilnego modelu, a drzewa tego nie spełniają — nasz generator daje prawdziwie niezależne zbiory i prawdziwy, duży test.</a:t>
+            </a:r>
+          </a:p>
+          <a:p>
+            <a:r>
+              <a:t>Źródła: publikacja, dokumentacja scikit-learn, karta tematu i kontrakt. Praca autora vs nasz wkład: od Kohaviego pytanie, definicje i schemat porównania; generator, protokół, kod i eksperyment własny są nasze.</a:t>
+            </a:r>
+          </a:p>
+          <a:p>
+            <a:r>
+              <a:t>Informacja o AI (załącznik 2A) jest osobnym PDF-em dołączonym do zadania w Moodle.</a:t>
+            </a:r>
+          </a:p>
+          <a:p>
+            <a:r>
+              <a:t>NA PYTANIA — trzy pytania kontrolne z karty: (1) 10 foldów ≠ 10 niezależnych pomiarów, bo zbiory uczące pokrywają się w 8/9; (2) niższa wariancja ≠ mniejsze obciążenie (bootstrap .632: mała wariancja, obciążenie do 9,8 p.p.); (3) według dużego testu nie wolno dobierać parametrów modeli, generatora ani wariantu CV.</a:t>
             </a:r>
           </a:p>
         </p:txBody>
@@ -803,7 +767,22 @@
           <a:lstStyle/>
           <a:p>
             <a:r>
-              <a:t>Kohavi mierzył trafność; my mierzymy błąd = 1 − trafność. Zamiana danych i modeli to adaptacja — cel metodologiczny bez zmian.</a:t>
+              <a:t>CO POWIEDZIEĆ (1,5 min): Kohavi porównał metody szacowania trafności klasyfikatora na małej próbce: holdout, k-krotną walidację krzyżową dla różnych k, leave-one-out i bootstrap. Zrobił to na dwóch różnych algorytmach (drzewo C4.5 i Naive-Bayes) i siedmiu zbiorach UCI, po 50 powtórzeń; „prawdziwą” trafność liczył holdoutem na reszcie zbioru. Wyniki: CV zaniża trafność (jest pesymistyczna), najbardziej dla 2 i 5 foldów; przy 10–20 foldach obciążenie prawie znika. Wariancja jest największa przy 2 foldach. Stratyfikacja zmniejsza i obciążenie, i wariancję. Bootstrap ma małą wariancję, ale na niektórych zbiorach ogromne obciążenie. Zalecenie: 10-krotna stratyfikowana CV.</a:t>
+            </a:r>
+          </a:p>
+          <a:p>
+            <a:r>
+              <a:t>FRAGMENT DO ODTWORZENIA: Rysunek 1 (obciążenie CV w funkcji k) i Rysunek 3 (odchylenie standardowe w funkcji k) — dla naszych dwóch modeli i k = 2, 5, 10. Bootstrapu, leave-k-out i k = 20 nie odtwarzamy — karta tematu tego nie wymaga.</a:t>
+            </a:r>
+          </a:p>
+          <a:p>
+            <a:r>
+              <a:t>ADAPTACJA (powiedzieć wprost): dane i modele są inne — narzuca je karta tematu. Zachowujemy cel i schemat badania: te same foldy dla obu modeli, wiele niezależnych powtórzeń, punkt odniesienia niezależny od CV.</a:t>
+            </a:r>
+          </a:p>
+          <a:p>
+            <a:r>
+              <a:t>MOŻLIWE PYTANIE: „czym różni się Wasz punkt odniesienia od Kohaviego?” — on nie znał prawdy, więc szacował ją holdoutem na reszcie zbioru; my generujemy dane, więc mamy duży niezależny test 10 000 obiektów.</a:t>
             </a:r>
           </a:p>
         </p:txBody>
@@ -873,7 +852,32 @@
           <a:lstStyle/>
           <a:p>
             <a:r>
-              <a:t>Hipotezy wynikają z krzywej uczenia (mniej danych → większy błąd) i z niestabilności modelu. Wynik negatywny nie obniża oceny, jeśli procedura jest poprawna.</a:t>
+              <a:t>CO POWIEDZIEĆ (1 min): Przeczytać pytanie z karty tematu. Potem hipotezy z uzasadnieniem:</a:t>
+            </a:r>
+          </a:p>
+          <a:p>
+            <a:r>
+              <a:t>H1 — model w foldzie uczy się na n(k−1)/k obiektach, czyli przy k = 2 tylko na 100 z 200. Mniej danych = większy błąd (krzywa uczenia), więc CV zawyża błąd; przy k = 10 trening ma 180 obiektów i różnica prawie znika.</a:t>
+            </a:r>
+          </a:p>
+          <a:p>
+            <a:r>
+              <a:t>H1′ — przy k = 2 model jest „chwiejny”: inne 100 obiektów daje wyraźnie inny model, więc estymata skacze.</a:t>
+            </a:r>
+          </a:p>
+          <a:p>
+            <a:r>
+              <a:t>H1″ — Kohavi pokazuje (Propozycja 1), że dla modelu stabilnego CV jest nieobciążona i jej wariancja nie zależy od k. GaussianNB uczy się tylko średnich i wariancji cech — jest stabilny; drzewo CART bez przycinania zmienia kształt przy każdej zmianie danych — jest niestabilne. Więc efekty powinny być widoczne głównie dla CART.</a:t>
+            </a:r>
+          </a:p>
+          <a:p>
+            <a:r>
+              <a:t>H2 — stratyfikacja nie zmienia rozmiaru treningu (ta sama krzywa uczenia → obciążenie podobne), ale usuwa losowe wahania proporcji klas między foldami → mniejsza zmienność; i z definicji żaden fold nie zostaje bez klasy rzadkiej.</a:t>
+            </a:r>
+          </a:p>
+          <a:p>
+            <a:r>
+              <a:t>PODKREŚLIĆ: wynik negatywny nie obniża oceny (kontrakt §6) — hipotezy to przewidywania, nie cel.</a:t>
             </a:r>
           </a:p>
         </p:txBody>
@@ -943,7 +947,27 @@
           <a:lstStyle/>
           <a:p>
             <a:r>
-              <a:t>Pytanie kontrolne: czy niższa wariancja oznacza mniejsze obciążenie? Nie — to dwie różne składowe błędu estymatora (MSE = bias² + wariancja). U Kohaviego bootstrap .632 ma niską wariancję i duże obciążenie.</a:t>
+              <a:t>CO POWIEDZIEĆ (1,5 min): Generalizacja: błąd prawdziwy e(C) to prawdopodobieństwo pomyłki na NOWYM obiekcie z tego samego rozkładu. Nie da się go policzyć dokładnie — w praktyce nie mamy nowych danych. My mamy generator, więc tworzymy duży niezależny test T (10 000 obiektów) i błąd na nim, e_test, traktujemy jako prawdę (jego własna niepewność to ok. 0,4 punktu procentowego).</a:t>
+            </a:r>
+          </a:p>
+          <a:p>
+            <a:r>
+              <a:t>Obciążenie estymatora = wartość oczekiwana różnicy między estymatą ê_CV a prawdą e_test; E[·] to średnia po nieskończenie wielu powtórzeniach — my przybliżamy ją średnią z 30. Dodatnie obciążenie = CV zawyża błąd = pesymizm (Kohavi mówi o zaniżonej trafności — to samo). Zmienność = odchylenie standardowe tej różnicy między powtórzeniami, czyli „jak bardzo wynik skacze”. Dokładnie tak definiuje to karta tematu.</a:t>
+            </a:r>
+          </a:p>
+          <a:p>
+            <a:r>
+              <a:t>Trening/walidacja: w CV model widzi tylko część danych — przy k = 2 połowę. Mniej danych → większy błąd → ê_CV mierzy błąd gorszego modelu niż ten na całych 200 → pesymizm. Im większe k, tym większy trening w pojedynczym dopasowaniu i tym mniejszy pesymizm.</a:t>
+            </a:r>
+          </a:p>
+          <a:p>
+            <a:r>
+              <a:t>Powtórzenie badania to CAŁY niezależny zbiór D_r (nie fold) — bo foldy nie są niezależne (następny slajd).</a:t>
+            </a:r>
+          </a:p>
+          <a:p>
+            <a:r>
+              <a:t>PYTANIE KONTROLNE 2: „czy niższa wariancja oznacza mniejsze obciążenie?” — NIE, to dwie osobne rzeczy (strzelec: można strzelać powtarzalnie i zawsze obok). Przykład Kohaviego: bootstrap .632 ma małą wariancję i obciążenie do 9,8 p.p.</a:t>
             </a:r>
           </a:p>
         </p:txBody>
@@ -1013,7 +1037,17 @@
           <a:lstStyle/>
           <a:p>
             <a:r>
-              <a:t>Każdy obiekt jest dokładnie raz w foldzie testowym. k foldów = k dopasowań modelu. Pytanie kontrolne 1: dziesięć foldów nie daje dziesięciu niezależnych pomiarów, bo zbiory uczące nakładają się w 8/9.</a:t>
+              <a:t>CO POWIEDZIEĆ (1,5 min): Przeczytać wzór symbol po symbolu. Zbiór D dzielimy losowo na k foldów. Dla każdego foldu j uczymy model na pozostałych k−1 foldach (C_−j, „minus j” = bez j-tego) i sprawdzamy na odłożonym D_j: m_j pomyłek na |D_j| obiektów daje e_j. Estymata ê_CV to zwykła średnia z k błędów foldów. Daszek = oszacowanie, nie prawda. Każdy obiekt jest dokładnie raz w foldzie testowym, więc przy równych foldach średnia = (wszystkie pomyłki)/n — to wzór (4) Kohaviego; u nas 200 dzieli się przez 2, 5 i 10, więc obie wersje są identyczne.</a:t>
+            </a:r>
+          </a:p>
+          <a:p>
+            <a:r>
+              <a:t>Koszt: k dopasowań modelu na jedno ê_CV.</a:t>
+            </a:r>
+          </a:p>
+          <a:p>
+            <a:r>
+              <a:t>PYTANIE KONTROLNE 1: „dlaczego 10 foldów nie daje 10 niezależnych pomiarów?” — zbiory uczące sąsiednich foldów pokrywają się w 8 z 9 (ogólnie (k−2)/(k−1)); to prawie te same modele, więc e_j są skorelowane. Odchylenie między foldami podzielone przez pierwiastek z k zaniża niepewność. Skrajny przykład Kohaviego: iris + model „zawsze klasa większościowa” + leave-one-out → każdy fold 0 % trafności, rozrzut 0, a prawda 33 %. Dlatego jednostką powtórzenia jest cały niezależny zbiór D_r.</a:t>
             </a:r>
           </a:p>
         </p:txBody>
@@ -1083,7 +1117,17 @@
           <a:lstStyle/>
           <a:p>
             <a:r>
-              <a:t>Do weryfikacji ustnej: policzyć średnią pięciu ułamków i pokazać, że 29/200 daje to samo. Ujemna różnica w jednym zbiorze nie przeczy pesymistycznemu obciążeniu — obciążenie to średnia po wielu zbiorach.</a:t>
+              <a:t>CO POWIEDZIEĆ (1,5 min) — POLICZYĆ NA GŁOS: zbiór D_1 z naszego generatora, 200 obiektów, GaussianNB, 5 foldów po 40. Pomyłki na foldach: 7, 3, 7, 8, 4. Błędy: 7/40 = 0,175; 3/40 = 0,075; 7/40 = 0,175; 8/40 = 0,200; 4/40 = 0,100. Suma 0,725, podzielić przez 5: ê_CV = 0,145. Kontrola drugim sposobem: 29 pomyłek / 200 obiektów = 0,145 — to samo, bo foldy są równe.</a:t>
+            </a:r>
+          </a:p>
+          <a:p>
+            <a:r>
+              <a:t>Punkt odniesienia: ten sam GaussianNB nauczony na całych 200 obiektach, sprawdzony na teście T: 1754 pomyłki na 10 000 → e_test = 0,1754. Różnica = 0,145 − 0,1754 = −0,030: w tym konkretnym zbiorze CV ZANIŻYŁA błąd o 3 p.p. — czyli optymizm, wbrew hipotezie. To nie przeczy H1: obciążenie to ŚREDNIA z wielu zbiorów, a pojedynczy błąd foldu z 40 obiektów ma rozrzut ok. 6 p.p. Dopiero 30 różnic (po jednej na niezależny zbiór) da średnią (obciążenie) i odchylenie standardowe (zmienność).</a:t>
+            </a:r>
+          </a:p>
+          <a:p>
+            <a:r>
+              <a:t>JEŚLI ZAPYTAJĄ O SD: na 3 liczbach, np. różnice 0,01; 0,03; 0,05 → średnia 0,03, odchylenia −0,02/0/+0,02, kwadraty 0,0004/0/0,0004, suma 0,0008 / (3−1) = 0,0004, pierwiastek 0,02.</a:t>
             </a:r>
           </a:p>
         </p:txBody>
@@ -1153,7 +1197,27 @@
           <a:lstStyle/>
           <a:p>
             <a:r>
-              <a:t>Parametry generatora ustalone a priori (znany błąd Bayesa), nie według testu. GaussianNB jest tu dobrze wyspecyfikowany (stabilny), CART musi przybliżać granicę ukośną (niestabilny). Zmiana δ: większe δ → mniejszy błąd.</a:t>
+              <a:t>CO POWIEDZIEĆ (1,5 min): Karta tematu każe ustalić generator, liczbę powtórzeń i ocenę referencyjną.</a:t>
+            </a:r>
+          </a:p>
+          <a:p>
+            <a:r>
+              <a:t>GENERATOR: każdy obiekt ma 10 cech i klasę y. Najpierw losujemy klasę (Bernoulli: π₁ = 0,5 w odtworzeniu, 0,1 w eksperymencie własnym), potem 10 cech z rozkładu normalnego o środku zależnym od klasy. Środki μ₀ i μ₁ leżą symetrycznie w odległości δ = 2 wzdłuż kierunku u: pierwsze 5 cech różni klasy (informacyjne), ostatnie 5 to czysty szum. Rysunek: po lewej 200 wylosowanych punktów na dwóch cechach — klasy się mieszają; po prawej oba „dzwony” po rzucie na kierunek u. Zacieniowane pola = błąd Bayesa, czyli błąd najlepszego możliwego klasyfikatora: Φ(−δ/2) = Φ(−1) = 15,9 %. Przy klasie rzadkiej granica przesuwa się w stronę klasy rzadkiej (próg ln 9/δ ≈ 1,10) i błąd Bayesa to 7,0 % — ale „zawsze klasa 0” ma 10 %, dlatego w eksperymencie własnym mierzymy też czułość.</a:t>
+            </a:r>
+          </a:p>
+          <a:p>
+            <a:r>
+              <a:t>DLACZEGO TAKI: znamy błąd Bayesa, więc wiemy, jak daleko od ideału są modele. GaussianNB zakłada dokładnie ten rozkład (niezależne cechy normalne) → stabilny; CART tnie równolegle do osi, a granica jest ukośna → musi ją schodkować, przeucza się → niestabilny. To odpowiednik pary Naive-Bayes / C4.5 u Kohaviego.</a:t>
+            </a:r>
+          </a:p>
+          <a:p>
+            <a:r>
+              <a:t>POWTÓRZENIA: 30 niezależnych zbiorów po 200 (z karty), ziarno 1000 + r. OCENA REFERENCYJNA: jeden test T, 10 000 obiektów, osobne ziarno; służy WYŁĄCZNIE do oceny — nic według niego nie dobieramy (pytanie kontrolne 3). Parametry generatora ustaliliśmy z teorii (błąd Bayesa ok. 16 %), zanim cokolwiek policzyliśmy.</a:t>
+            </a:r>
+          </a:p>
+          <a:p>
+            <a:r>
+              <a:t>ZMIANA PARAMETRU (gdyby pytali): większe δ → mniejszy błąd Bayesa, płaska krzywa uczenia, mniejszy pesymizm; więcej cech szumowych → większy błąd i pesymizm, zwłaszcza dla CART.</a:t>
             </a:r>
           </a:p>
         </p:txBody>
@@ -1223,7 +1287,22 @@
           <a:lstStyle/>
           <a:p>
             <a:r>
-              <a:t>Czego nie wolno wybierać według dużego testu: parametrów modeli, generatora ani wariantu CV — T służy tylko do oceny. Wskazanie w kodzie: experiment.run_series.</a:t>
+              <a:t>CO POWIEDZIEĆ (1 min) — przejść po strzałkach: generator tworzy 30 niezależnych zbiorów D_r po 200 obiektów (ziarno 1000 + r) i jeden test T z osobnego ziarna. Dla każdego zbioru i każdego z dwóch modeli: górna ścieżka — CV z k = 2, 5, 10 na tym samym zbiorze i z tymi samymi podziałami dla obu modeli (jak u Kohaviego: ziarno podziału zależy tylko od r) → trzy estymaty ê_CV; dolna ścieżka — model na całym D_r sprawdzony na T → e_test. Różnica Δ = ê_CV − e_test; dla każdego k i modelu mamy 30 niezależnych Δ → średnia to obciążenie, odchylenie standardowe to zmienność (dokładnie wielkości z karty tematu).</a:t>
+            </a:r>
+          </a:p>
+          <a:p>
+            <a:r>
+              <a:t>Wszystko utrwalone w cvbias/protocol.py przed badaniem: rozmiary, ziarna, k, modele, metryka — karta: „przed końcowym badaniem utrwal podziały danych, parametry, metryki i losowania”.</a:t>
+            </a:r>
+          </a:p>
+          <a:p>
+            <a:r>
+              <a:t>Koszt: na zbiór i model 2 + 5 + 10 dopasowań w CV + 1 na całości = 18; razem 30 · 2 · 18 = 1080.</a:t>
+            </a:r>
+          </a:p>
+          <a:p>
+            <a:r>
+              <a:t>GDZIE W KODZIE (gdyby prosili): experiment.run_series — generate(T) raz przed pętlą; pętla po r; fit_and_predict na całym D_r → e_test; make_splitter(…, seeds['split'] + r) → te same podziały; cross_validate → błędy foldów.</a:t>
             </a:r>
           </a:p>
         </p:txBody>
@@ -1293,7 +1372,22 @@
           <a:lstStyle/>
           <a:p>
             <a:r>
-              <a:t>Stratyfikacja nie zmienia rozmiaru treningu, więc obciążenie podobne; usuwa losowość udziału klas między foldami, więc zmniejsza zmienność. Czułość dodajemy, bo przy 10 % klasy rzadkiej błąd 0/1 jest zdominowany przez klasę większościową.</a:t>
+              <a:t>CO POWIEDZIEĆ (1 min): Karta: udział klasy rzadkiej ok. 10 %, porównanie zwykłej i stratyfikowanej 5-foldowej CV NA TYCH SAMYCH PRÓBKACH. Stratyfikacja = foldy mają proporcje klas takie jak cały zbiór (StratifiedKFold losuje osobno w każdej klasie). Bierzemy ten sam zbiór D_r i dzielimy go dwoma sposobami z tym samym ziarnem — różni się tylko przydział do foldów.</a:t>
+            </a:r>
+          </a:p>
+          <a:p>
+            <a:r>
+              <a:t>Tabela z próby: w D_1 jest 24 obiekty klasy rzadkiej; zwykły KFold rozrzucił je 2/5/9/6/2, stratyfikowany 4/5/5/5/5. W zbiorze D_3 (14 rzadkich) zwykły podział dał fold bez ani jednego obiektu klasy rzadkiej — wtedy czułość to 0/0, nieokreślona. Karta każe takie przypadki zapisywać: w CSV jest flaga i powód; nie wstawiamy zera, nie pomijamy po cichu, a liczba takich foldów jest jedną z miar.</a:t>
+            </a:r>
+          </a:p>
+          <a:p>
+            <a:r>
+              <a:t>Dlaczego czułość: przy 10 % klasy rzadkiej model „zawsze 0” ma tylko 10 % błędu — odsetek pomyłek nie pokazuje, czy klasa rzadka jest w ogóle wykrywana.</a:t>
+            </a:r>
+          </a:p>
+          <a:p>
+            <a:r>
+              <a:t>Oczekiwanie (H2): obciążenie podobne (ten sam rozmiar treningu w foldzie), zmienność mniejsza (znika losowość proporcji klas między foldami) — zgodne z obserwacją Kohaviego, że stratyfikacja jest „jednolicie lepsza”.</a:t>
             </a:r>
           </a:p>
         </p:txBody>
@@ -5201,8 +5295,8 @@
         </p:nvSpPr>
         <p:spPr>
           <a:xfrm>
-            <a:off x="841248" y="3154680"/>
-            <a:ext cx="5120640" cy="2468880"/>
+            <a:off x="841248" y="3200400"/>
+            <a:ext cx="5120640" cy="2377440"/>
           </a:xfrm>
           <a:prstGeom prst="rect">
             <a:avLst/>
@@ -5223,7 +5317,7 @@
                 <a:spcPts val="0"/>
               </a:spcBef>
               <a:spcAft>
-                <a:spcPts val="500"/>
+                <a:spcPts val="600"/>
               </a:spcAft>
               <a:buNone/>
             </a:pPr>
@@ -5234,79 +5328,7 @@
                 </a:solidFill>
                 <a:latin typeface="Arial"/>
               </a:rPr>
-              <a:t>Środowisko i uruchomienie</a:t>
-            </a:r>
-          </a:p>
-          <a:p>
-            <a:pPr algn="l" marL="219456" indent="-219456">
-              <a:lnSpc>
-                <a:spcPct val="108000"/>
-              </a:lnSpc>
-              <a:spcBef>
-                <a:spcPts val="0"/>
-              </a:spcBef>
-              <a:spcAft>
-                <a:spcPts val="500"/>
-              </a:spcAft>
-              <a:buFont typeface="Arial"/>
-              <a:buChar char="•"/>
-            </a:pPr>
-            <a:r>
-              <a:rPr sz="1400" b="0" i="0">
-                <a:solidFill>
-                  <a:srgbClr val="0B0B0B"/>
-                </a:solidFill>
-                <a:latin typeface="Arial"/>
-              </a:rPr>
-              <a:t>Python 3.14.8, numpy 2.4.4, scikit‑learn 1.8.0</a:t>
-            </a:r>
-          </a:p>
-          <a:p>
-            <a:pPr algn="l" marL="219456" indent="-219456">
-              <a:lnSpc>
-                <a:spcPct val="108000"/>
-              </a:lnSpc>
-              <a:spcBef>
-                <a:spcPts val="0"/>
-              </a:spcBef>
-              <a:spcAft>
-                <a:spcPts val="500"/>
-              </a:spcAft>
-              <a:buFont typeface="Arial"/>
-              <a:buChar char="•"/>
-            </a:pPr>
-            <a:r>
-              <a:rPr sz="1300" b="0" i="0">
-                <a:solidFill>
-                  <a:srgbClr val="52514E"/>
-                </a:solidFill>
-                <a:latin typeface="Arial"/>
-              </a:rPr>
-              <a:t>python run_experiment.py --reps 3 --out results/pilot</a:t>
-            </a:r>
-          </a:p>
-          <a:p>
-            <a:pPr algn="l" marL="219456" indent="-219456">
-              <a:lnSpc>
-                <a:spcPct val="108000"/>
-              </a:lnSpc>
-              <a:spcBef>
-                <a:spcPts val="0"/>
-              </a:spcBef>
-              <a:spcAft>
-                <a:spcPts val="500"/>
-              </a:spcAft>
-              <a:buFont typeface="Arial"/>
-              <a:buChar char="•"/>
-            </a:pPr>
-            <a:r>
-              <a:rPr sz="1400" b="0" i="0">
-                <a:solidFill>
-                  <a:srgbClr val="0B0B0B"/>
-                </a:solidFill>
-                <a:latin typeface="Arial"/>
-              </a:rPr>
-              <a:t>Zapisujemy: błąd i skład klas każdego foldu (CSV), podsumowania, meta.json z wersjami, ziarnami i liczbą dopasowań</a:t>
+              <a:t>Środowisko</a:t>
             </a:r>
           </a:p>
           <a:p>
@@ -5324,131 +5346,13 @@
               <a:buChar char="•"/>
             </a:pPr>
             <a:r>
-              <a:rPr sz="1400" b="0" i="0">
+              <a:rPr sz="1500" b="0" i="0">
                 <a:solidFill>
                   <a:srgbClr val="0B0B0B"/>
                 </a:solidFill>
                 <a:latin typeface="Arial"/>
               </a:rPr>
-              <a:t>Kod i wyniki: github.com/FylyppS/rozpoznawanie-wzorcow</a:t>
-            </a:r>
-          </a:p>
-        </p:txBody>
-      </p:sp>
-      <p:sp>
-        <p:nvSpPr>
-          <p:cNvPr id="13" name="TextBox 12"/>
-          <p:cNvSpPr txBox="1"/>
-          <p:nvPr/>
-        </p:nvSpPr>
-        <p:spPr>
-          <a:xfrm>
-            <a:off x="6236208" y="3154680"/>
-            <a:ext cx="5120640" cy="2468880"/>
-          </a:xfrm>
-          <a:prstGeom prst="rect">
-            <a:avLst/>
-          </a:prstGeom>
-          <a:noFill/>
-        </p:spPr>
-        <p:txBody>
-          <a:bodyPr wrap="square" lIns="36576" rIns="36576" tIns="18288" bIns="18288" anchor="t">
-            <a:spAutoFit/>
-          </a:bodyPr>
-          <a:lstStyle/>
-          <a:p>
-            <a:pPr algn="l" marL="0" indent="0">
-              <a:lnSpc>
-                <a:spcPct val="108000"/>
-              </a:lnSpc>
-              <a:spcBef>
-                <a:spcPts val="0"/>
-              </a:spcBef>
-              <a:spcAft>
-                <a:spcPts val="500"/>
-              </a:spcAft>
-              <a:buNone/>
-            </a:pPr>
-            <a:r>
-              <a:rPr sz="1500" b="1" i="0">
-                <a:solidFill>
-                  <a:srgbClr val="1F3A5F"/>
-                </a:solidFill>
-                <a:latin typeface="Arial"/>
-              </a:rPr>
-              <a:t>Kontrola poprawności</a:t>
-            </a:r>
-          </a:p>
-          <a:p>
-            <a:pPr algn="l" marL="219456" indent="-219456">
-              <a:lnSpc>
-                <a:spcPct val="108000"/>
-              </a:lnSpc>
-              <a:spcBef>
-                <a:spcPts val="0"/>
-              </a:spcBef>
-              <a:spcAft>
-                <a:spcPts val="500"/>
-              </a:spcAft>
-              <a:buFont typeface="Arial"/>
-              <a:buChar char="•"/>
-            </a:pPr>
-            <a:r>
-              <a:rPr sz="1400" b="0" i="0">
-                <a:solidFill>
-                  <a:srgbClr val="0B0B0B"/>
-                </a:solidFill>
-                <a:latin typeface="Arial"/>
-              </a:rPr>
-              <a:t>Duży test tylko do oceny estymatora — nie dobieramy według niego parametrów modeli ani generatora</a:t>
-            </a:r>
-          </a:p>
-          <a:p>
-            <a:pPr algn="l" marL="219456" indent="-219456">
-              <a:lnSpc>
-                <a:spcPct val="108000"/>
-              </a:lnSpc>
-              <a:spcBef>
-                <a:spcPts val="0"/>
-              </a:spcBef>
-              <a:spcAft>
-                <a:spcPts val="500"/>
-              </a:spcAft>
-              <a:buFont typeface="Arial"/>
-              <a:buChar char="•"/>
-            </a:pPr>
-            <a:r>
-              <a:rPr sz="1400" b="0" i="0">
-                <a:solidFill>
-                  <a:srgbClr val="0B0B0B"/>
-                </a:solidFill>
-                <a:latin typeface="Arial"/>
-              </a:rPr>
-              <a:t>Te same zbiory D_r i te same podziały dla wszystkich wariantów CV i obu modeli</a:t>
-            </a:r>
-          </a:p>
-          <a:p>
-            <a:pPr algn="l" marL="219456" indent="-219456">
-              <a:lnSpc>
-                <a:spcPct val="108000"/>
-              </a:lnSpc>
-              <a:spcBef>
-                <a:spcPts val="0"/>
-              </a:spcBef>
-              <a:spcAft>
-                <a:spcPts val="500"/>
-              </a:spcAft>
-              <a:buFont typeface="Arial"/>
-              <a:buChar char="•"/>
-            </a:pPr>
-            <a:r>
-              <a:rPr sz="1400" b="0" i="0">
-                <a:solidFill>
-                  <a:srgbClr val="0B0B0B"/>
-                </a:solidFill>
-                <a:latin typeface="Arial"/>
-              </a:rPr>
-              <a:t>Ziarna, rozmiary, k, metryki utrwalone przed badaniem (cvbias/protocol.py)</a:t>
+              <a:t>Python 3.14.8, scikit‑learn 1.8.0</a:t>
             </a:r>
           </a:p>
           <a:p>
@@ -5466,13 +5370,179 @@
               <a:buChar char="•"/>
             </a:pPr>
             <a:r>
-              <a:rPr sz="1400" b="0" i="0">
+              <a:rPr sz="1500" b="0" i="0">
                 <a:solidFill>
                   <a:srgbClr val="0B0B0B"/>
                 </a:solidFill>
                 <a:latin typeface="Arial"/>
               </a:rPr>
-              <a:t>Brak przecieku: model w foldzie widzi tylko D ∖ D_j; T ma osobne ziarno</a:t>
+              <a:t>Zapisujemy błąd i skład klas każdego foldu, podsumowania, meta.json (wersje, ziarna, liczba dopasowań)</a:t>
+            </a:r>
+          </a:p>
+          <a:p>
+            <a:pPr algn="l" marL="219456" indent="-219456">
+              <a:lnSpc>
+                <a:spcPct val="108000"/>
+              </a:lnSpc>
+              <a:spcBef>
+                <a:spcPts val="0"/>
+              </a:spcBef>
+              <a:spcAft>
+                <a:spcPts val="600"/>
+              </a:spcAft>
+              <a:buFont typeface="Arial"/>
+              <a:buChar char="•"/>
+            </a:pPr>
+            <a:r>
+              <a:rPr sz="1500" b="0" i="0">
+                <a:solidFill>
+                  <a:srgbClr val="0B0B0B"/>
+                </a:solidFill>
+                <a:latin typeface="Arial"/>
+              </a:rPr>
+              <a:t>github.com/FylyppS/rozpoznawanie-wzorcow</a:t>
+            </a:r>
+          </a:p>
+        </p:txBody>
+      </p:sp>
+      <p:sp>
+        <p:nvSpPr>
+          <p:cNvPr id="13" name="TextBox 12"/>
+          <p:cNvSpPr txBox="1"/>
+          <p:nvPr/>
+        </p:nvSpPr>
+        <p:spPr>
+          <a:xfrm>
+            <a:off x="6236208" y="3200400"/>
+            <a:ext cx="5120640" cy="2377440"/>
+          </a:xfrm>
+          <a:prstGeom prst="rect">
+            <a:avLst/>
+          </a:prstGeom>
+          <a:noFill/>
+        </p:spPr>
+        <p:txBody>
+          <a:bodyPr wrap="square" lIns="36576" rIns="36576" tIns="18288" bIns="18288" anchor="t">
+            <a:spAutoFit/>
+          </a:bodyPr>
+          <a:lstStyle/>
+          <a:p>
+            <a:pPr algn="l" marL="0" indent="0">
+              <a:lnSpc>
+                <a:spcPct val="108000"/>
+              </a:lnSpc>
+              <a:spcBef>
+                <a:spcPts val="0"/>
+              </a:spcBef>
+              <a:spcAft>
+                <a:spcPts val="600"/>
+              </a:spcAft>
+              <a:buNone/>
+            </a:pPr>
+            <a:r>
+              <a:rPr sz="1500" b="1" i="0">
+                <a:solidFill>
+                  <a:srgbClr val="1F3A5F"/>
+                </a:solidFill>
+                <a:latin typeface="Arial"/>
+              </a:rPr>
+              <a:t>Kontrola poprawności</a:t>
+            </a:r>
+          </a:p>
+          <a:p>
+            <a:pPr algn="l" marL="219456" indent="-219456">
+              <a:lnSpc>
+                <a:spcPct val="108000"/>
+              </a:lnSpc>
+              <a:spcBef>
+                <a:spcPts val="0"/>
+              </a:spcBef>
+              <a:spcAft>
+                <a:spcPts val="600"/>
+              </a:spcAft>
+              <a:buFont typeface="Arial"/>
+              <a:buChar char="•"/>
+            </a:pPr>
+            <a:r>
+              <a:rPr sz="1500" b="0" i="0">
+                <a:solidFill>
+                  <a:srgbClr val="0B0B0B"/>
+                </a:solidFill>
+                <a:latin typeface="Arial"/>
+              </a:rPr>
+              <a:t>Duży test tylko do oceny — nic według niego nie dobieramy</a:t>
+            </a:r>
+          </a:p>
+          <a:p>
+            <a:pPr algn="l" marL="219456" indent="-219456">
+              <a:lnSpc>
+                <a:spcPct val="108000"/>
+              </a:lnSpc>
+              <a:spcBef>
+                <a:spcPts val="0"/>
+              </a:spcBef>
+              <a:spcAft>
+                <a:spcPts val="600"/>
+              </a:spcAft>
+              <a:buFont typeface="Arial"/>
+              <a:buChar char="•"/>
+            </a:pPr>
+            <a:r>
+              <a:rPr sz="1500" b="0" i="0">
+                <a:solidFill>
+                  <a:srgbClr val="0B0B0B"/>
+                </a:solidFill>
+                <a:latin typeface="Arial"/>
+              </a:rPr>
+              <a:t>Te same zbiory i podziały dla wszystkich wariantów CV i obu modeli</a:t>
+            </a:r>
+          </a:p>
+          <a:p>
+            <a:pPr algn="l" marL="219456" indent="-219456">
+              <a:lnSpc>
+                <a:spcPct val="108000"/>
+              </a:lnSpc>
+              <a:spcBef>
+                <a:spcPts val="0"/>
+              </a:spcBef>
+              <a:spcAft>
+                <a:spcPts val="600"/>
+              </a:spcAft>
+              <a:buFont typeface="Arial"/>
+              <a:buChar char="•"/>
+            </a:pPr>
+            <a:r>
+              <a:rPr sz="1500" b="0" i="0">
+                <a:solidFill>
+                  <a:srgbClr val="0B0B0B"/>
+                </a:solidFill>
+                <a:latin typeface="Arial"/>
+              </a:rPr>
+              <a:t>Ziarna, rozmiary, k, metryki utrwalone przed badaniem</a:t>
+            </a:r>
+          </a:p>
+          <a:p>
+            <a:pPr algn="l" marL="219456" indent="-219456">
+              <a:lnSpc>
+                <a:spcPct val="108000"/>
+              </a:lnSpc>
+              <a:spcBef>
+                <a:spcPts val="0"/>
+              </a:spcBef>
+              <a:spcAft>
+                <a:spcPts val="600"/>
+              </a:spcAft>
+              <a:buFont typeface="Arial"/>
+              <a:buChar char="•"/>
+            </a:pPr>
+            <a:r>
+              <a:rPr sz="1500" b="0" i="0">
+                <a:solidFill>
+                  <a:srgbClr val="0B0B0B"/>
+                </a:solidFill>
+                <a:latin typeface="Arial"/>
+              </a:rPr>
+              <a:t>Brak przecieku: model w foldzie widzi tylko D ∖ Dⱼ</a:t>
             </a:r>
           </a:p>
         </p:txBody>
@@ -5523,7 +5593,7 @@
                 </a:solidFill>
                 <a:latin typeface="Arial"/>
               </a:rPr>
-              <a:t>Ograniczenia planu, źródła i informacja o AI</a:t>
+              <a:t>Ograniczenia planu i źródła</a:t>
             </a:r>
           </a:p>
         </p:txBody>
@@ -5537,7 +5607,7 @@
         <p:spPr>
           <a:xfrm>
             <a:off x="841248" y="1691640"/>
-            <a:ext cx="5120640" cy="3931920"/>
+            <a:ext cx="5120640" cy="3657600"/>
           </a:xfrm>
           <a:prstGeom prst="roundRect">
             <a:avLst>
@@ -5583,7 +5653,7 @@
         <p:spPr>
           <a:xfrm>
             <a:off x="1024128" y="1828800"/>
-            <a:ext cx="4754880" cy="3749039"/>
+            <a:ext cx="4754880" cy="3474720"/>
           </a:xfrm>
           <a:prstGeom prst="rect">
             <a:avLst/>
@@ -5604,7 +5674,7 @@
                 <a:spcPts val="0"/>
               </a:spcBef>
               <a:spcAft>
-                <a:spcPts val="800"/>
+                <a:spcPts val="1000"/>
               </a:spcAft>
               <a:buNone/>
             </a:pPr>
@@ -5627,19 +5697,19 @@
                 <a:spcPts val="0"/>
               </a:spcBef>
               <a:spcAft>
-                <a:spcPts val="700"/>
+                <a:spcPts val="1000"/>
               </a:spcAft>
               <a:buFont typeface="Arial"/>
               <a:buChar char="•"/>
             </a:pPr>
             <a:r>
-              <a:rPr sz="1400" b="0" i="0">
+              <a:rPr sz="1500" b="0" i="0">
                 <a:solidFill>
                   <a:srgbClr val="0B0B0B"/>
                 </a:solidFill>
                 <a:latin typeface="Arial"/>
               </a:rPr>
-              <a:t>Dane syntetyczne o rozkładzie zgodnym z założeniami GaussianNB — wyniki dla NB mogą być „zbyt ładne”.</a:t>
+              <a:t>Dane „idealne” dla GaussianNB (rozkład zgodny z jego założeniami).</a:t>
             </a:r>
           </a:p>
           <a:p>
@@ -5651,19 +5721,19 @@
                 <a:spcPts val="0"/>
               </a:spcBef>
               <a:spcAft>
-                <a:spcPts val="700"/>
+                <a:spcPts val="1000"/>
               </a:spcAft>
               <a:buFont typeface="Arial"/>
               <a:buChar char="•"/>
             </a:pPr>
             <a:r>
-              <a:rPr sz="1400" b="0" i="0">
+              <a:rPr sz="1500" b="0" i="0">
                 <a:solidFill>
                   <a:srgbClr val="0B0B0B"/>
                 </a:solidFill>
                 <a:latin typeface="Arial"/>
               </a:rPr>
-              <a:t>Jeden wspólny test T dla wszystkich powtórzeń (słaba korelacja e_test,r; mała przy N = 10 000).</a:t>
+              <a:t>Jeden wspólny test T dla wszystkich powtórzeń.</a:t>
             </a:r>
           </a:p>
           <a:p>
@@ -5675,19 +5745,19 @@
                 <a:spcPts val="0"/>
               </a:spcBef>
               <a:spcAft>
-                <a:spcPts val="700"/>
+                <a:spcPts val="1000"/>
               </a:spcAft>
               <a:buFont typeface="Arial"/>
               <a:buChar char="•"/>
             </a:pPr>
             <a:r>
-              <a:rPr sz="1400" b="0" i="0">
+              <a:rPr sz="1500" b="0" i="0">
                 <a:solidFill>
                   <a:srgbClr val="0B0B0B"/>
                 </a:solidFill>
                 <a:latin typeface="Arial"/>
               </a:rPr>
-              <a:t>R = 30 → błąd standardowy obciążenia ≈ sd/√30 (≈ 0,5 p.p.); małe efekty mogą być nieodróżnialne od zera.</a:t>
+              <a:t>R = 30: efekty poniżej ok. 1 p.p. nieodróżnialne od zera.</a:t>
             </a:r>
           </a:p>
           <a:p>
@@ -5705,13 +5775,13 @@
               <a:buChar char="•"/>
             </a:pPr>
             <a:r>
-              <a:rPr sz="1400" b="0" i="0">
+              <a:rPr sz="1500" b="0" i="0">
                 <a:solidFill>
                   <a:srgbClr val="0B0B0B"/>
                 </a:solidFill>
                 <a:latin typeface="Arial"/>
               </a:rPr>
-              <a:t>U Kohaviego „prawdziwa” trafność z holdoutu i próbki z jednego zbioru też nie są bez wad — nasz test z generatora jest czystszy.</a:t>
+              <a:t>Kohavi: „prawda” z holdoutu; próbki z jednego zbioru; Propozycja 1 zakłada stabilny model.</a:t>
             </a:r>
           </a:p>
         </p:txBody>
@@ -5725,7 +5795,7 @@
         <p:spPr>
           <a:xfrm>
             <a:off x="6236208" y="1691640"/>
-            <a:ext cx="5120640" cy="3931920"/>
+            <a:ext cx="5120640" cy="3657600"/>
           </a:xfrm>
           <a:prstGeom prst="roundRect">
             <a:avLst>
@@ -5771,7 +5841,7 @@
         <p:spPr>
           <a:xfrm>
             <a:off x="6419088" y="1828800"/>
-            <a:ext cx="4754880" cy="3749039"/>
+            <a:ext cx="4754880" cy="3474720"/>
           </a:xfrm>
           <a:prstGeom prst="rect">
             <a:avLst/>
@@ -5785,6 +5855,101 @@
           <a:lstStyle/>
           <a:p>
             <a:pPr algn="l" marL="0" indent="0">
+              <a:lnSpc>
+                <a:spcPct val="108000"/>
+              </a:lnSpc>
+              <a:spcBef>
+                <a:spcPts val="0"/>
+              </a:spcBef>
+              <a:spcAft>
+                <a:spcPts val="1000"/>
+              </a:spcAft>
+              <a:buNone/>
+            </a:pPr>
+            <a:r>
+              <a:rPr sz="1600" b="1" i="0">
+                <a:solidFill>
+                  <a:srgbClr val="1F3A5F"/>
+                </a:solidFill>
+                <a:latin typeface="Arial"/>
+              </a:rPr>
+              <a:t>Źródła</a:t>
+            </a:r>
+          </a:p>
+          <a:p>
+            <a:pPr algn="l" marL="219456" indent="-219456">
+              <a:lnSpc>
+                <a:spcPct val="108000"/>
+              </a:lnSpc>
+              <a:spcBef>
+                <a:spcPts val="0"/>
+              </a:spcBef>
+              <a:spcAft>
+                <a:spcPts val="1000"/>
+              </a:spcAft>
+              <a:buFont typeface="Arial"/>
+              <a:buChar char="•"/>
+            </a:pPr>
+            <a:r>
+              <a:rPr sz="1400" b="0" i="0">
+                <a:solidFill>
+                  <a:srgbClr val="0B0B0B"/>
+                </a:solidFill>
+                <a:latin typeface="Arial"/>
+              </a:rPr>
+              <a:t>R. Kohavi, A Study of Cross-Validation and Bootstrap for Accuracy Estimation and Model Selection, IJCAI 1995 — ai.stanford.edu/~ronnyk/accEst.pdf</a:t>
+            </a:r>
+          </a:p>
+          <a:p>
+            <a:pPr algn="l" marL="219456" indent="-219456">
+              <a:lnSpc>
+                <a:spcPct val="108000"/>
+              </a:lnSpc>
+              <a:spcBef>
+                <a:spcPts val="0"/>
+              </a:spcBef>
+              <a:spcAft>
+                <a:spcPts val="1000"/>
+              </a:spcAft>
+              <a:buFont typeface="Arial"/>
+              <a:buChar char="•"/>
+            </a:pPr>
+            <a:r>
+              <a:rPr sz="1400" b="0" i="0">
+                <a:solidFill>
+                  <a:srgbClr val="0B0B0B"/>
+                </a:solidFill>
+                <a:latin typeface="Arial"/>
+              </a:rPr>
+              <a:t>scikit-learn 1.8.0: KFold, StratifiedKFold, GaussianNB, DecisionTreeClassifier</a:t>
+            </a:r>
+          </a:p>
+          <a:p>
+            <a:pPr algn="l" marL="219456" indent="-219456">
+              <a:lnSpc>
+                <a:spcPct val="108000"/>
+              </a:lnSpc>
+              <a:spcBef>
+                <a:spcPts val="0"/>
+              </a:spcBef>
+              <a:spcAft>
+                <a:spcPts val="1000"/>
+              </a:spcAft>
+              <a:buFont typeface="Arial"/>
+              <a:buChar char="•"/>
+            </a:pPr>
+            <a:r>
+              <a:rPr sz="1400" b="0" i="0">
+                <a:solidFill>
+                  <a:srgbClr val="0B0B0B"/>
+                </a:solidFill>
+                <a:latin typeface="Arial"/>
+              </a:rPr>
+              <a:t>Karta tematu 06 i kontrakt przedmiotu (Moodle PO)</a:t>
+            </a:r>
+          </a:p>
+          <a:p>
+            <a:pPr algn="l" marL="219456" indent="-219456">
               <a:lnSpc>
                 <a:spcPct val="108000"/>
               </a:lnSpc>
@@ -5794,530 +5959,17 @@
               <a:spcAft>
                 <a:spcPts val="600"/>
               </a:spcAft>
-              <a:buNone/>
-            </a:pPr>
-            <a:r>
-              <a:rPr sz="1600" b="1" i="0">
-                <a:solidFill>
-                  <a:srgbClr val="1F3A5F"/>
-                </a:solidFill>
-                <a:latin typeface="Arial"/>
-              </a:rPr>
-              <a:t>Źródła</a:t>
-            </a:r>
-          </a:p>
-          <a:p>
-            <a:pPr algn="l" marL="219456" indent="-219456">
-              <a:lnSpc>
-                <a:spcPct val="108000"/>
-              </a:lnSpc>
-              <a:spcBef>
-                <a:spcPts val="0"/>
-              </a:spcBef>
-              <a:spcAft>
-                <a:spcPts val="500"/>
-              </a:spcAft>
               <a:buFont typeface="Arial"/>
               <a:buChar char="•"/>
             </a:pPr>
             <a:r>
-              <a:rPr sz="1300" b="0" i="0">
+              <a:rPr sz="1400" b="0" i="0">
                 <a:solidFill>
                   <a:srgbClr val="0B0B0B"/>
                 </a:solidFill>
                 <a:latin typeface="Arial"/>
               </a:rPr>
-              <a:t>R. Kohavi, A Study of Cross-Validation and Bootstrap for Accuracy Estimation and Model Selection, IJCAI 1995 — ai.stanford.edu/~ronnyk/accEst.pdf</a:t>
-            </a:r>
-          </a:p>
-          <a:p>
-            <a:pPr algn="l" marL="219456" indent="-219456">
-              <a:lnSpc>
-                <a:spcPct val="108000"/>
-              </a:lnSpc>
-              <a:spcBef>
-                <a:spcPts val="0"/>
-              </a:spcBef>
-              <a:spcAft>
-                <a:spcPts val="500"/>
-              </a:spcAft>
-              <a:buFont typeface="Arial"/>
-              <a:buChar char="•"/>
-            </a:pPr>
-            <a:r>
-              <a:rPr sz="1300" b="0" i="0">
-                <a:solidFill>
-                  <a:srgbClr val="0B0B0B"/>
-                </a:solidFill>
-                <a:latin typeface="Arial"/>
-              </a:rPr>
-              <a:t>scikit-learn 1.8.0: KFold, StratifiedKFold, GaussianNB, DecisionTreeClassifier</a:t>
-            </a:r>
-          </a:p>
-          <a:p>
-            <a:pPr algn="l" marL="219456" indent="-219456">
-              <a:lnSpc>
-                <a:spcPct val="108000"/>
-              </a:lnSpc>
-              <a:spcBef>
-                <a:spcPts val="0"/>
-              </a:spcBef>
-              <a:spcAft>
-                <a:spcPts val="1200"/>
-              </a:spcAft>
-              <a:buFont typeface="Arial"/>
-              <a:buChar char="•"/>
-            </a:pPr>
-            <a:r>
-              <a:rPr sz="1300" b="0" i="0">
-                <a:solidFill>
-                  <a:srgbClr val="0B0B0B"/>
-                </a:solidFill>
-                <a:latin typeface="Arial"/>
-              </a:rPr>
-              <a:t>Karta tematu 06 i kontrakt przedmiotu (Moodle PO)</a:t>
-            </a:r>
-          </a:p>
-          <a:p>
-            <a:pPr algn="l" marL="0" indent="0">
-              <a:lnSpc>
-                <a:spcPct val="108000"/>
-              </a:lnSpc>
-              <a:spcBef>
-                <a:spcPts val="0"/>
-              </a:spcBef>
-              <a:spcAft>
-                <a:spcPts val="600"/>
-              </a:spcAft>
-              <a:buNone/>
-            </a:pPr>
-            <a:r>
-              <a:rPr sz="1600" b="1" i="0">
-                <a:solidFill>
-                  <a:srgbClr val="1F3A5F"/>
-                </a:solidFill>
-                <a:latin typeface="Arial"/>
-              </a:rPr>
-              <a:t>Informacja o AI (załącznik 2A, wariant 1)</a:t>
-            </a:r>
-          </a:p>
-          <a:p>
-            <a:pPr algn="l" marL="0" indent="0">
-              <a:lnSpc>
-                <a:spcPct val="108000"/>
-              </a:lnSpc>
-              <a:spcBef>
-                <a:spcPts val="0"/>
-              </a:spcBef>
-              <a:spcAft>
-                <a:spcPts val="600"/>
-              </a:spcAft>
-              <a:buNone/>
-            </a:pPr>
-            <a:r>
-              <a:rPr sz="1300" b="0" i="0">
-                <a:solidFill>
-                  <a:srgbClr val="52514E"/>
-                </a:solidFill>
-                <a:latin typeface="Arial"/>
-              </a:rPr>
-              <a:t>Poziom 2 — AI jako wsparcie pracy. Narzędzie: Claude (Anthropic) w Claude Code — pomoc w analizie publikacji, szkic protokołu i kodu, redakcja slajdów. Kod uruchomiony i sprawdzony przez nas; liczby pochodzą z faktycznych obliczeń. Pełna informacja w załączonym PDF.</a:t>
-            </a:r>
-          </a:p>
-        </p:txBody>
-      </p:sp>
-    </p:spTree>
-  </p:cSld>
-  <p:clrMapOvr>
-    <a:masterClrMapping/>
-  </p:clrMapOvr>
-</p:sld>
-</file>
-
-<file path=ppt/slides/slide12.xml><?xml version="1.0" encoding="utf-8"?>
-<p:sld xmlns:a="http://schemas.openxmlformats.org/drawingml/2006/main" xmlns:p="http://schemas.openxmlformats.org/presentationml/2006/main" xmlns:r="http://schemas.openxmlformats.org/officeDocument/2006/relationships">
-  <p:cSld>
-    <p:spTree>
-      <p:nvGrpSpPr>
-        <p:cNvPr id="1" name=""/>
-        <p:cNvGrpSpPr/>
-        <p:nvPr/>
-      </p:nvGrpSpPr>
-      <p:grpSpPr/>
-      <p:sp>
-        <p:nvSpPr>
-          <p:cNvPr id="2" name="Title 1"/>
-          <p:cNvSpPr>
-            <a:spLocks noGrp="1"/>
-          </p:cNvSpPr>
-          <p:nvPr>
-            <p:ph type="title"/>
-          </p:nvPr>
-        </p:nvSpPr>
-        <p:spPr>
-          <a:xfrm>
-            <a:off x="841248" y="731520"/>
-            <a:ext cx="10515600" cy="822960"/>
-          </a:xfrm>
-        </p:spPr>
-        <p:txBody>
-          <a:bodyPr anchor="ctr"/>
-          <a:lstStyle/>
-          <a:p>
-            <a:pPr algn="ctr"/>
-            <a:r>
-              <a:rPr sz="3000" b="0">
-                <a:solidFill>
-                  <a:srgbClr val="0B0B0B"/>
-                </a:solidFill>
-                <a:latin typeface="Arial"/>
-              </a:rPr>
-              <a:t>Slajd zapasowy: pytania kontrolne z karty tematu</a:t>
-            </a:r>
-          </a:p>
-        </p:txBody>
-      </p:sp>
-      <p:sp>
-        <p:nvSpPr>
-          <p:cNvPr id="3" name="Rounded Rectangle 2"/>
-          <p:cNvSpPr/>
-          <p:nvPr/>
-        </p:nvSpPr>
-        <p:spPr>
-          <a:xfrm>
-            <a:off x="841248" y="1691640"/>
-            <a:ext cx="10515600" cy="1234440"/>
-          </a:xfrm>
-          <a:prstGeom prst="roundRect">
-            <a:avLst>
-              <a:gd name="adj" fmla="val 7000"/>
-            </a:avLst>
-          </a:prstGeom>
-          <a:solidFill>
-            <a:srgbClr val="F3F5F8"/>
-          </a:solidFill>
-          <a:ln>
-            <a:noFill/>
-          </a:ln>
-          <a:effectLst/>
-        </p:spPr>
-        <p:style>
-          <a:lnRef idx="1">
-            <a:schemeClr val="accent1"/>
-          </a:lnRef>
-          <a:fillRef idx="3">
-            <a:schemeClr val="accent1"/>
-          </a:fillRef>
-          <a:effectRef idx="2">
-            <a:schemeClr val="accent1"/>
-          </a:effectRef>
-          <a:fontRef idx="minor">
-            <a:schemeClr val="lt1"/>
-          </a:fontRef>
-        </p:style>
-        <p:txBody>
-          <a:bodyPr rtlCol="0" anchor="ctr"/>
-          <a:lstStyle/>
-          <a:p>
-            <a:pPr algn="ctr"/>
-          </a:p>
-        </p:txBody>
-      </p:sp>
-      <p:sp>
-        <p:nvSpPr>
-          <p:cNvPr id="4" name="TextBox 3"/>
-          <p:cNvSpPr txBox="1"/>
-          <p:nvPr/>
-        </p:nvSpPr>
-        <p:spPr>
-          <a:xfrm>
-            <a:off x="1024128" y="1764792"/>
-            <a:ext cx="10149840" cy="1143000"/>
-          </a:xfrm>
-          <a:prstGeom prst="rect">
-            <a:avLst/>
-          </a:prstGeom>
-          <a:noFill/>
-        </p:spPr>
-        <p:txBody>
-          <a:bodyPr wrap="square" lIns="36576" rIns="36576" tIns="18288" bIns="18288" anchor="t">
-            <a:spAutoFit/>
-          </a:bodyPr>
-          <a:lstStyle/>
-          <a:p>
-            <a:pPr algn="l" marL="0" indent="0">
-              <a:lnSpc>
-                <a:spcPct val="108000"/>
-              </a:lnSpc>
-              <a:spcBef>
-                <a:spcPts val="0"/>
-              </a:spcBef>
-              <a:spcAft>
-                <a:spcPts val="300"/>
-              </a:spcAft>
-              <a:buNone/>
-            </a:pPr>
-            <a:r>
-              <a:rPr sz="1500" b="1" i="0">
-                <a:solidFill>
-                  <a:srgbClr val="1F3A5F"/>
-                </a:solidFill>
-                <a:latin typeface="Arial"/>
-              </a:rPr>
-              <a:t>Dlaczego dziesięć foldów nie daje dziesięciu niezależnych pomiarów?</a:t>
-            </a:r>
-          </a:p>
-          <a:p>
-            <a:pPr algn="l" marL="0" indent="0">
-              <a:lnSpc>
-                <a:spcPct val="108000"/>
-              </a:lnSpc>
-              <a:spcBef>
-                <a:spcPts val="0"/>
-              </a:spcBef>
-              <a:spcAft>
-                <a:spcPts val="600"/>
-              </a:spcAft>
-              <a:buNone/>
-            </a:pPr>
-            <a:r>
-              <a:rPr sz="1350" b="0" i="0">
-                <a:solidFill>
-                  <a:srgbClr val="52514E"/>
-                </a:solidFill>
-                <a:latin typeface="Arial"/>
-              </a:rPr>
-              <a:t>Zbiory uczące kolejnych foldów pokrywają się w 8/9; każdy obiekt współtworzy 9 z 10 modeli, więc błędy foldów są skorelowane. Niezależne są dopiero powtórzenia na osobnych zbiorach D_r.</a:t>
-            </a:r>
-          </a:p>
-        </p:txBody>
-      </p:sp>
-      <p:sp>
-        <p:nvSpPr>
-          <p:cNvPr id="5" name="Rounded Rectangle 4"/>
-          <p:cNvSpPr/>
-          <p:nvPr/>
-        </p:nvSpPr>
-        <p:spPr>
-          <a:xfrm>
-            <a:off x="841248" y="3063240"/>
-            <a:ext cx="10515600" cy="1234440"/>
-          </a:xfrm>
-          <a:prstGeom prst="roundRect">
-            <a:avLst>
-              <a:gd name="adj" fmla="val 7000"/>
-            </a:avLst>
-          </a:prstGeom>
-          <a:solidFill>
-            <a:srgbClr val="E8EEF6"/>
-          </a:solidFill>
-          <a:ln>
-            <a:noFill/>
-          </a:ln>
-          <a:effectLst/>
-        </p:spPr>
-        <p:style>
-          <a:lnRef idx="1">
-            <a:schemeClr val="accent1"/>
-          </a:lnRef>
-          <a:fillRef idx="3">
-            <a:schemeClr val="accent1"/>
-          </a:fillRef>
-          <a:effectRef idx="2">
-            <a:schemeClr val="accent1"/>
-          </a:effectRef>
-          <a:fontRef idx="minor">
-            <a:schemeClr val="lt1"/>
-          </a:fontRef>
-        </p:style>
-        <p:txBody>
-          <a:bodyPr rtlCol="0" anchor="ctr"/>
-          <a:lstStyle/>
-          <a:p>
-            <a:pPr algn="ctr"/>
-          </a:p>
-        </p:txBody>
-      </p:sp>
-      <p:sp>
-        <p:nvSpPr>
-          <p:cNvPr id="6" name="TextBox 5"/>
-          <p:cNvSpPr txBox="1"/>
-          <p:nvPr/>
-        </p:nvSpPr>
-        <p:spPr>
-          <a:xfrm>
-            <a:off x="1024128" y="3136392"/>
-            <a:ext cx="10149840" cy="1143000"/>
-          </a:xfrm>
-          <a:prstGeom prst="rect">
-            <a:avLst/>
-          </a:prstGeom>
-          <a:noFill/>
-        </p:spPr>
-        <p:txBody>
-          <a:bodyPr wrap="square" lIns="36576" rIns="36576" tIns="18288" bIns="18288" anchor="t">
-            <a:spAutoFit/>
-          </a:bodyPr>
-          <a:lstStyle/>
-          <a:p>
-            <a:pPr algn="l" marL="0" indent="0">
-              <a:lnSpc>
-                <a:spcPct val="108000"/>
-              </a:lnSpc>
-              <a:spcBef>
-                <a:spcPts val="0"/>
-              </a:spcBef>
-              <a:spcAft>
-                <a:spcPts val="300"/>
-              </a:spcAft>
-              <a:buNone/>
-            </a:pPr>
-            <a:r>
-              <a:rPr sz="1500" b="1" i="0">
-                <a:solidFill>
-                  <a:srgbClr val="1F3A5F"/>
-                </a:solidFill>
-                <a:latin typeface="Arial"/>
-              </a:rPr>
-              <a:t>Czy niższa wariancja oznacza mniejsze obciążenie?</a:t>
-            </a:r>
-          </a:p>
-          <a:p>
-            <a:pPr algn="l" marL="0" indent="0">
-              <a:lnSpc>
-                <a:spcPct val="108000"/>
-              </a:lnSpc>
-              <a:spcBef>
-                <a:spcPts val="0"/>
-              </a:spcBef>
-              <a:spcAft>
-                <a:spcPts val="600"/>
-              </a:spcAft>
-              <a:buNone/>
-            </a:pPr>
-            <a:r>
-              <a:rPr sz="1350" b="0" i="0">
-                <a:solidFill>
-                  <a:srgbClr val="52514E"/>
-                </a:solidFill>
-                <a:latin typeface="Arial"/>
-              </a:rPr>
-              <a:t>Nie. To osobne składowe błędu estymatora (MSE = obciążenie² + wariancja). Bootstrap .632 u Kohaviego: niska wariancja, obciążenie do 9,8 p.p.; leave-one-out: prawie nieobciążone, wysoka wariancja.</a:t>
-            </a:r>
-          </a:p>
-        </p:txBody>
-      </p:sp>
-      <p:sp>
-        <p:nvSpPr>
-          <p:cNvPr id="7" name="Rounded Rectangle 6"/>
-          <p:cNvSpPr/>
-          <p:nvPr/>
-        </p:nvSpPr>
-        <p:spPr>
-          <a:xfrm>
-            <a:off x="841248" y="4434840"/>
-            <a:ext cx="10515600" cy="1234440"/>
-          </a:xfrm>
-          <a:prstGeom prst="roundRect">
-            <a:avLst>
-              <a:gd name="adj" fmla="val 7000"/>
-            </a:avLst>
-          </a:prstGeom>
-          <a:solidFill>
-            <a:srgbClr val="F3F5F8"/>
-          </a:solidFill>
-          <a:ln>
-            <a:noFill/>
-          </a:ln>
-          <a:effectLst/>
-        </p:spPr>
-        <p:style>
-          <a:lnRef idx="1">
-            <a:schemeClr val="accent1"/>
-          </a:lnRef>
-          <a:fillRef idx="3">
-            <a:schemeClr val="accent1"/>
-          </a:fillRef>
-          <a:effectRef idx="2">
-            <a:schemeClr val="accent1"/>
-          </a:effectRef>
-          <a:fontRef idx="minor">
-            <a:schemeClr val="lt1"/>
-          </a:fontRef>
-        </p:style>
-        <p:txBody>
-          <a:bodyPr rtlCol="0" anchor="ctr"/>
-          <a:lstStyle/>
-          <a:p>
-            <a:pPr algn="ctr"/>
-          </a:p>
-        </p:txBody>
-      </p:sp>
-      <p:sp>
-        <p:nvSpPr>
-          <p:cNvPr id="8" name="TextBox 7"/>
-          <p:cNvSpPr txBox="1"/>
-          <p:nvPr/>
-        </p:nvSpPr>
-        <p:spPr>
-          <a:xfrm>
-            <a:off x="1024128" y="4507992"/>
-            <a:ext cx="10149840" cy="1143000"/>
-          </a:xfrm>
-          <a:prstGeom prst="rect">
-            <a:avLst/>
-          </a:prstGeom>
-          <a:noFill/>
-        </p:spPr>
-        <p:txBody>
-          <a:bodyPr wrap="square" lIns="36576" rIns="36576" tIns="18288" bIns="18288" anchor="t">
-            <a:spAutoFit/>
-          </a:bodyPr>
-          <a:lstStyle/>
-          <a:p>
-            <a:pPr algn="l" marL="0" indent="0">
-              <a:lnSpc>
-                <a:spcPct val="108000"/>
-              </a:lnSpc>
-              <a:spcBef>
-                <a:spcPts val="0"/>
-              </a:spcBef>
-              <a:spcAft>
-                <a:spcPts val="300"/>
-              </a:spcAft>
-              <a:buNone/>
-            </a:pPr>
-            <a:r>
-              <a:rPr sz="1500" b="1" i="0">
-                <a:solidFill>
-                  <a:srgbClr val="1F3A5F"/>
-                </a:solidFill>
-                <a:latin typeface="Arial"/>
-              </a:rPr>
-              <a:t>Czego nie wolno wybierać według dużego testu?</a:t>
-            </a:r>
-          </a:p>
-          <a:p>
-            <a:pPr algn="l" marL="0" indent="0">
-              <a:lnSpc>
-                <a:spcPct val="108000"/>
-              </a:lnSpc>
-              <a:spcBef>
-                <a:spcPts val="0"/>
-              </a:spcBef>
-              <a:spcAft>
-                <a:spcPts val="600"/>
-              </a:spcAft>
-              <a:buNone/>
-            </a:pPr>
-            <a:r>
-              <a:rPr sz="1350" b="0" i="0">
-                <a:solidFill>
-                  <a:srgbClr val="52514E"/>
-                </a:solidFill>
-                <a:latin typeface="Arial"/>
-              </a:rPr>
-              <a:t>Parametrów modeli, parametrów generatora ani wariantu CV. Duży test ocenia estymator; każdy wybór „pod” T zamieniłby ocenę referencyjną w zbiór walidacyjny i zaniżył mierzony błąd.</a:t>
+              <a:t>Kod, protokół i surowe wyniki: github.com/FylyppS/rozpoznawanie-wzorcow</a:t>
             </a:r>
           </a:p>
         </p:txBody>
@@ -6382,7 +6034,7 @@
         <p:spPr>
           <a:xfrm>
             <a:off x="841248" y="1691640"/>
-            <a:ext cx="6035040" cy="3840480"/>
+            <a:ext cx="5486400" cy="3566160"/>
           </a:xfrm>
           <a:prstGeom prst="roundRect">
             <a:avLst>
@@ -6428,7 +6080,7 @@
         <p:spPr>
           <a:xfrm>
             <a:off x="1024128" y="1828800"/>
-            <a:ext cx="5669280" cy="3566160"/>
+            <a:ext cx="5120640" cy="3291840"/>
           </a:xfrm>
           <a:prstGeom prst="rect">
             <a:avLst/>
@@ -6442,6 +6094,29 @@
           <a:lstStyle/>
           <a:p>
             <a:pPr algn="l" marL="0" indent="0">
+              <a:lnSpc>
+                <a:spcPct val="108000"/>
+              </a:lnSpc>
+              <a:spcBef>
+                <a:spcPts val="0"/>
+              </a:spcBef>
+              <a:spcAft>
+                <a:spcPts val="1000"/>
+              </a:spcAft>
+              <a:buNone/>
+            </a:pPr>
+            <a:r>
+              <a:rPr sz="1700" b="1" i="0">
+                <a:solidFill>
+                  <a:srgbClr val="1F3A5F"/>
+                </a:solidFill>
+                <a:latin typeface="Arial"/>
+              </a:rPr>
+              <a:t>Kohavi (IJCAI 1995)</a:t>
+            </a:r>
+          </a:p>
+          <a:p>
+            <a:pPr algn="l" marL="219456" indent="-219456">
               <a:lnSpc>
                 <a:spcPct val="108000"/>
               </a:lnSpc>
@@ -6451,16 +6126,89 @@
               <a:spcAft>
                 <a:spcPts val="800"/>
               </a:spcAft>
-              <a:buNone/>
+              <a:buFont typeface="Arial"/>
+              <a:buChar char="•"/>
             </a:pPr>
             <a:r>
-              <a:rPr sz="1700" b="1" i="0">
+              <a:rPr sz="1500" b="0" i="0">
                 <a:solidFill>
-                  <a:srgbClr val="1F3A5F"/>
+                  <a:srgbClr val="0B0B0B"/>
                 </a:solidFill>
                 <a:latin typeface="Arial"/>
               </a:rPr>
-              <a:t>Kohavi (IJCAI 1995)</a:t>
+              <a:t>Jak dobrze CV i bootstrap szacują trafność klasyfikatora?</a:t>
+            </a:r>
+          </a:p>
+          <a:p>
+            <a:pPr algn="l" marL="219456" indent="-219456">
+              <a:lnSpc>
+                <a:spcPct val="108000"/>
+              </a:lnSpc>
+              <a:spcBef>
+                <a:spcPts val="0"/>
+              </a:spcBef>
+              <a:spcAft>
+                <a:spcPts val="800"/>
+              </a:spcAft>
+              <a:buFont typeface="Arial"/>
+              <a:buChar char="•"/>
+            </a:pPr>
+            <a:r>
+              <a:rPr sz="1500" b="0" i="0">
+                <a:solidFill>
+                  <a:srgbClr val="0B0B0B"/>
+                </a:solidFill>
+                <a:latin typeface="Arial"/>
+              </a:rPr>
+              <a:t>C4.5 i Naive‑Bayes, 7 zbiorów UCI, 50 powtórzeń</a:t>
+            </a:r>
+          </a:p>
+          <a:p>
+            <a:pPr algn="l" marL="219456" indent="-219456">
+              <a:lnSpc>
+                <a:spcPct val="108000"/>
+              </a:lnSpc>
+              <a:spcBef>
+                <a:spcPts val="0"/>
+              </a:spcBef>
+              <a:spcAft>
+                <a:spcPts val="800"/>
+              </a:spcAft>
+              <a:buFont typeface="Arial"/>
+              <a:buChar char="•"/>
+            </a:pPr>
+            <a:r>
+              <a:rPr sz="1500" b="0" i="0">
+                <a:solidFill>
+                  <a:srgbClr val="0B0B0B"/>
+                </a:solidFill>
+                <a:latin typeface="Arial"/>
+              </a:rPr>
+              <a:t>CV pesymistyczna dla k = 2 i 5; k = 10–20 prawie bez obciążenia</a:t>
+            </a:r>
+          </a:p>
+          <a:p>
+            <a:pPr algn="l" marL="219456" indent="-219456">
+              <a:lnSpc>
+                <a:spcPct val="108000"/>
+              </a:lnSpc>
+              <a:spcBef>
+                <a:spcPts val="0"/>
+              </a:spcBef>
+              <a:spcAft>
+                <a:spcPts val="800"/>
+              </a:spcAft>
+              <a:buFont typeface="Arial"/>
+              <a:buChar char="•"/>
+            </a:pPr>
+            <a:r>
+              <a:rPr sz="1500" b="0" i="0">
+                <a:solidFill>
+                  <a:srgbClr val="0B0B0B"/>
+                </a:solidFill>
+                <a:latin typeface="Arial"/>
+              </a:rPr>
+              <a:t>Największa wariancja dla k = 2; stratyfikacja pomaga</a:t>
             </a:r>
           </a:p>
           <a:p>
@@ -6478,102 +6226,6 @@
               <a:buChar char="•"/>
             </a:pPr>
             <a:r>
-              <a:rPr sz="1500" b="0" i="0">
-                <a:solidFill>
-                  <a:srgbClr val="0B0B0B"/>
-                </a:solidFill>
-                <a:latin typeface="Arial"/>
-              </a:rPr>
-              <a:t>Pytanie: jak dobrze walidacja krzyżowa (CV) i bootstrap szacują trafność klasyfikatora?</a:t>
-            </a:r>
-          </a:p>
-          <a:p>
-            <a:pPr algn="l" marL="219456" indent="-219456">
-              <a:lnSpc>
-                <a:spcPct val="108000"/>
-              </a:lnSpc>
-              <a:spcBef>
-                <a:spcPts val="0"/>
-              </a:spcBef>
-              <a:spcAft>
-                <a:spcPts val="600"/>
-              </a:spcAft>
-              <a:buFont typeface="Arial"/>
-              <a:buChar char="•"/>
-            </a:pPr>
-            <a:r>
-              <a:rPr sz="1500" b="0" i="0">
-                <a:solidFill>
-                  <a:srgbClr val="0B0B0B"/>
-                </a:solidFill>
-                <a:latin typeface="Arial"/>
-              </a:rPr>
-              <a:t>C4.5 i Naive‑Bayes na 7 zbiorach UCI, 50 powtórzeń; „prawdziwa” trafność z holdoutu na reszcie zbioru</a:t>
-            </a:r>
-          </a:p>
-          <a:p>
-            <a:pPr algn="l" marL="219456" indent="-219456">
-              <a:lnSpc>
-                <a:spcPct val="108000"/>
-              </a:lnSpc>
-              <a:spcBef>
-                <a:spcPts val="0"/>
-              </a:spcBef>
-              <a:spcAft>
-                <a:spcPts val="600"/>
-              </a:spcAft>
-              <a:buFont typeface="Arial"/>
-              <a:buChar char="•"/>
-            </a:pPr>
-            <a:r>
-              <a:rPr sz="1500" b="0" i="0">
-                <a:solidFill>
-                  <a:srgbClr val="0B0B0B"/>
-                </a:solidFill>
-                <a:latin typeface="Arial"/>
-              </a:rPr>
-              <a:t>CV zaniża trafność (pesymizm) — najbardziej dla k = 2 i 5; dla k = 10–20 prawie bez obciążenia</a:t>
-            </a:r>
-          </a:p>
-          <a:p>
-            <a:pPr algn="l" marL="219456" indent="-219456">
-              <a:lnSpc>
-                <a:spcPct val="108000"/>
-              </a:lnSpc>
-              <a:spcBef>
-                <a:spcPts val="0"/>
-              </a:spcBef>
-              <a:spcAft>
-                <a:spcPts val="600"/>
-              </a:spcAft>
-              <a:buFont typeface="Arial"/>
-              <a:buChar char="•"/>
-            </a:pPr>
-            <a:r>
-              <a:rPr sz="1500" b="0" i="0">
-                <a:solidFill>
-                  <a:srgbClr val="0B0B0B"/>
-                </a:solidFill>
-                <a:latin typeface="Arial"/>
-              </a:rPr>
-              <a:t>Największa wariancja dla k = 2; stratyfikacja zmniejsza obciążenie i wariancję</a:t>
-            </a:r>
-          </a:p>
-          <a:p>
-            <a:pPr algn="l" marL="219456" indent="-219456">
-              <a:lnSpc>
-                <a:spcPct val="108000"/>
-              </a:lnSpc>
-              <a:spcBef>
-                <a:spcPts val="0"/>
-              </a:spcBef>
-              <a:spcAft>
-                <a:spcPts val="600"/>
-              </a:spcAft>
-              <a:buFont typeface="Arial"/>
-              <a:buChar char="•"/>
-            </a:pPr>
-            <a:r>
               <a:rPr sz="1500" b="1" i="0">
                 <a:solidFill>
                   <a:srgbClr val="0B0B0B"/>
@@ -6593,8 +6245,8 @@
         </p:nvSpPr>
         <p:spPr>
           <a:xfrm>
-            <a:off x="7150608" y="1691640"/>
-            <a:ext cx="4206240" cy="365760"/>
+            <a:off x="6601968" y="1691640"/>
+            <a:ext cx="4754880" cy="365760"/>
           </a:xfrm>
           <a:prstGeom prst="rect">
             <a:avLst/>
@@ -6620,13 +6272,13 @@
               <a:buNone/>
             </a:pPr>
             <a:r>
-              <a:rPr sz="1500" b="1" i="0">
+              <a:rPr sz="1400" b="1" i="0">
                 <a:solidFill>
                   <a:srgbClr val="1F3A5F"/>
                 </a:solidFill>
                 <a:latin typeface="Arial"/>
               </a:rPr>
-              <a:t>Co odtwarzamy, a co zmieniamy</a:t>
+              <a:t>Odtwarzamy: Rys. 1 i Rys. 3 (obciążenie i rozrzut vs k)</a:t>
             </a:r>
           </a:p>
         </p:txBody>
@@ -6640,8 +6292,8 @@
           <p:nvPr/>
         </p:nvGraphicFramePr>
         <p:xfrm>
-          <a:off x="7150608" y="2103120"/>
-          <a:ext cx="4206240" cy="2688336"/>
+          <a:off x="6601968" y="2103120"/>
+          <a:ext cx="4754880" cy="2743200"/>
         </p:xfrm>
         <a:graphic>
           <a:graphicData uri="http://schemas.openxmlformats.org/drawingml/2006/table">
@@ -6650,11 +6302,11 @@
                 <a:tableStyleId>{5C22544A-7EE6-4342-B048-85BDC9FD1C3A}</a:tableStyleId>
               </a:tblPr>
               <a:tblGrid>
-                <a:gridCol w="1051560"/>
-                <a:gridCol w="1737360"/>
-                <a:gridCol w="1417320"/>
+                <a:gridCol w="1097280"/>
+                <a:gridCol w="2011680"/>
+                <a:gridCol w="1645920"/>
               </a:tblGrid>
-              <a:tr h="384048">
+              <a:tr h="457200">
                 <a:tc>
                   <a:txBody>
                     <a:bodyPr/>
@@ -6714,7 +6366,7 @@
                           </a:solidFill>
                           <a:latin typeface="Arial"/>
                         </a:rPr>
-                        <a:t>My</a:t>
+                        <a:t>My (adaptacja)</a:t>
                       </a:r>
                     </a:p>
                   </a:txBody>
@@ -6725,7 +6377,7 @@
                   </a:tcPr>
                 </a:tc>
               </a:tr>
-              <a:tr h="384048">
+              <a:tr h="457200">
                 <a:tc>
                   <a:txBody>
                     <a:bodyPr/>
@@ -6739,7 +6391,7 @@
                           </a:solidFill>
                           <a:latin typeface="Arial"/>
                         </a:rPr>
-                        <a:t>Pytanie</a:t>
+                        <a:t>Dane</a:t>
                       </a:r>
                     </a:p>
                   </a:txBody>
@@ -6762,7 +6414,7 @@
                           </a:solidFill>
                           <a:latin typeface="Arial"/>
                         </a:rPr>
-                        <a:t>obciążenie i wariancja CV vs k</a:t>
+                        <a:t>7 zbiorów UCI</a:t>
                       </a:r>
                     </a:p>
                   </a:txBody>
@@ -6785,7 +6437,7 @@
                           </a:solidFill>
                           <a:latin typeface="Arial"/>
                         </a:rPr>
-                        <a:t>to samo</a:t>
+                        <a:t>generator syntetyczny</a:t>
                       </a:r>
                     </a:p>
                   </a:txBody>
@@ -6796,7 +6448,7 @@
                   </a:tcPr>
                 </a:tc>
               </a:tr>
-              <a:tr h="384048">
+              <a:tr h="457200">
                 <a:tc>
                   <a:txBody>
                     <a:bodyPr/>
@@ -6810,7 +6462,7 @@
                           </a:solidFill>
                           <a:latin typeface="Arial"/>
                         </a:rPr>
-                        <a:t>Dane</a:t>
+                        <a:t>Modele</a:t>
                       </a:r>
                     </a:p>
                   </a:txBody>
@@ -6833,7 +6485,7 @@
                           </a:solidFill>
                           <a:latin typeface="Arial"/>
                         </a:rPr>
-                        <a:t>7 zbiorów UCI</a:t>
+                        <a:t>C4.5, Naive‑Bayes</a:t>
                       </a:r>
                     </a:p>
                   </a:txBody>
@@ -6856,7 +6508,7 @@
                           </a:solidFill>
                           <a:latin typeface="Arial"/>
                         </a:rPr>
-                        <a:t>generator syntetyczny</a:t>
+                        <a:t>CART, GaussianNB</a:t>
                       </a:r>
                     </a:p>
                   </a:txBody>
@@ -6867,7 +6519,7 @@
                   </a:tcPr>
                 </a:tc>
               </a:tr>
-              <a:tr h="384048">
+              <a:tr h="457200">
                 <a:tc>
                   <a:txBody>
                     <a:bodyPr/>
@@ -6881,7 +6533,7 @@
                           </a:solidFill>
                           <a:latin typeface="Arial"/>
                         </a:rPr>
-                        <a:t>Modele</a:t>
+                        <a:t>Odniesienie</a:t>
                       </a:r>
                     </a:p>
                   </a:txBody>
@@ -6904,7 +6556,7 @@
                           </a:solidFill>
                           <a:latin typeface="Arial"/>
                         </a:rPr>
-                        <a:t>C4.5, Naive‑Bayes</a:t>
+                        <a:t>holdout, 50 powtórzeń</a:t>
                       </a:r>
                     </a:p>
                   </a:txBody>
@@ -6927,7 +6579,7 @@
                           </a:solidFill>
                           <a:latin typeface="Arial"/>
                         </a:rPr>
-                        <a:t>CART, GaussianNB</a:t>
+                        <a:t>test N = 10 000, 30 powtórzeń</a:t>
                       </a:r>
                     </a:p>
                   </a:txBody>
@@ -6938,7 +6590,7 @@
                   </a:tcPr>
                 </a:tc>
               </a:tr>
-              <a:tr h="384048">
+              <a:tr h="457200">
                 <a:tc>
                   <a:txBody>
                     <a:bodyPr/>
@@ -6952,7 +6604,7 @@
                           </a:solidFill>
                           <a:latin typeface="Arial"/>
                         </a:rPr>
-                        <a:t>Odniesienie</a:t>
+                        <a:t>k</a:t>
                       </a:r>
                     </a:p>
                   </a:txBody>
@@ -6975,7 +6627,7 @@
                           </a:solidFill>
                           <a:latin typeface="Arial"/>
                         </a:rPr>
-                        <a:t>holdout, 50 powt.</a:t>
+                        <a:t>2, 5, 10, 20, LOO, bootstrap</a:t>
                       </a:r>
                     </a:p>
                   </a:txBody>
@@ -6998,7 +6650,7 @@
                           </a:solidFill>
                           <a:latin typeface="Arial"/>
                         </a:rPr>
-                        <a:t>test N = 10 000, 30 powt.</a:t>
+                        <a:t>2, 5, 10</a:t>
                       </a:r>
                     </a:p>
                   </a:txBody>
@@ -7009,7 +6661,7 @@
                   </a:tcPr>
                 </a:tc>
               </a:tr>
-              <a:tr h="384048">
+              <a:tr h="457200">
                 <a:tc>
                   <a:txBody>
                     <a:bodyPr/>
@@ -7023,7 +6675,7 @@
                           </a:solidFill>
                           <a:latin typeface="Arial"/>
                         </a:rPr>
-                        <a:t>k</a:t>
+                        <a:t>Bez zmian</a:t>
                       </a:r>
                     </a:p>
                   </a:txBody>
@@ -7046,7 +6698,7 @@
                           </a:solidFill>
                           <a:latin typeface="Arial"/>
                         </a:rPr>
-                        <a:t>2, 5, 10, 20, LOO, bootstrap</a:t>
+                        <a:t>te same foldy dla obu modeli; wiele niezależnych powtórzeń</a:t>
                       </a:r>
                     </a:p>
                   </a:txBody>
@@ -7069,84 +6721,13 @@
                           </a:solidFill>
                           <a:latin typeface="Arial"/>
                         </a:rPr>
-                        <a:t>2, 5, 10</a:t>
+                        <a:t>tak samo</a:t>
                       </a:r>
                     </a:p>
                   </a:txBody>
                   <a:tcPr marL="73152" marR="73152" marT="27432" marB="27432" anchor="ctr">
                     <a:solidFill>
                       <a:srgbClr val="FFFFFF"/>
-                    </a:solidFill>
-                  </a:tcPr>
-                </a:tc>
-              </a:tr>
-              <a:tr h="384048">
-                <a:tc>
-                  <a:txBody>
-                    <a:bodyPr/>
-                    <a:lstStyle/>
-                    <a:p>
-                      <a:pPr algn="l"/>
-                      <a:r>
-                        <a:rPr sz="1150" b="0">
-                          <a:solidFill>
-                            <a:srgbClr val="0B0B0B"/>
-                          </a:solidFill>
-                          <a:latin typeface="Arial"/>
-                        </a:rPr>
-                        <a:t>Stratyfikacja</a:t>
-                      </a:r>
-                    </a:p>
-                  </a:txBody>
-                  <a:tcPr marL="73152" marR="73152" marT="27432" marB="27432" anchor="ctr">
-                    <a:solidFill>
-                      <a:srgbClr val="F7F8FA"/>
-                    </a:solidFill>
-                  </a:tcPr>
-                </a:tc>
-                <a:tc>
-                  <a:txBody>
-                    <a:bodyPr/>
-                    <a:lstStyle/>
-                    <a:p>
-                      <a:pPr algn="l"/>
-                      <a:r>
-                        <a:rPr sz="1150" b="0">
-                          <a:solidFill>
-                            <a:srgbClr val="0B0B0B"/>
-                          </a:solidFill>
-                          <a:latin typeface="Arial"/>
-                        </a:rPr>
-                        <a:t>klasy zbalansowane</a:t>
-                      </a:r>
-                    </a:p>
-                  </a:txBody>
-                  <a:tcPr marL="73152" marR="73152" marT="27432" marB="27432" anchor="ctr">
-                    <a:solidFill>
-                      <a:srgbClr val="F7F8FA"/>
-                    </a:solidFill>
-                  </a:tcPr>
-                </a:tc>
-                <a:tc>
-                  <a:txBody>
-                    <a:bodyPr/>
-                    <a:lstStyle/>
-                    <a:p>
-                      <a:pPr algn="l"/>
-                      <a:r>
-                        <a:rPr sz="1150" b="0">
-                          <a:solidFill>
-                            <a:srgbClr val="0B0B0B"/>
-                          </a:solidFill>
-                          <a:latin typeface="Arial"/>
-                        </a:rPr>
-                        <a:t>klasa rzadka 10 %</a:t>
-                      </a:r>
-                    </a:p>
-                  </a:txBody>
-                  <a:tcPr marL="73152" marR="73152" marT="27432" marB="27432" anchor="ctr">
-                    <a:solidFill>
-                      <a:srgbClr val="F7F8FA"/>
                     </a:solidFill>
                   </a:tcPr>
                 </a:tc>
@@ -7208,60 +6789,14 @@
       </p:sp>
       <p:sp>
         <p:nvSpPr>
-          <p:cNvPr id="3" name="TextBox 2"/>
-          <p:cNvSpPr txBox="1"/>
-          <p:nvPr/>
-        </p:nvSpPr>
-        <p:spPr>
-          <a:xfrm>
-            <a:off x="841248" y="1691640"/>
-            <a:ext cx="10515600" cy="685800"/>
-          </a:xfrm>
-          <a:prstGeom prst="rect">
-            <a:avLst/>
-          </a:prstGeom>
-          <a:noFill/>
-        </p:spPr>
-        <p:txBody>
-          <a:bodyPr wrap="square" lIns="36576" rIns="36576" tIns="18288" bIns="18288" anchor="t">
-            <a:spAutoFit/>
-          </a:bodyPr>
-          <a:lstStyle/>
-          <a:p>
-            <a:pPr algn="l" marL="0" indent="0">
-              <a:lnSpc>
-                <a:spcPct val="108000"/>
-              </a:lnSpc>
-              <a:spcBef>
-                <a:spcPts val="0"/>
-              </a:spcBef>
-              <a:spcAft>
-                <a:spcPts val="600"/>
-              </a:spcAft>
-              <a:buNone/>
-            </a:pPr>
-            <a:r>
-              <a:rPr sz="1700" b="1" i="0">
-                <a:solidFill>
-                  <a:srgbClr val="1F3A5F"/>
-                </a:solidFill>
-                <a:latin typeface="Arial"/>
-              </a:rPr>
-              <a:t>Jak liczba części walidacji krzyżowej wpływa na obciążenie i zmienność szacowanego błędu oraz co zmienia stratyfikacja przy niezbalansowanych klasach?</a:t>
-            </a:r>
-          </a:p>
-        </p:txBody>
-      </p:sp>
-      <p:sp>
-        <p:nvSpPr>
-          <p:cNvPr id="4" name="Rounded Rectangle 3"/>
+          <p:cNvPr id="3" name="Rounded Rectangle 2"/>
           <p:cNvSpPr/>
           <p:nvPr/>
         </p:nvSpPr>
         <p:spPr>
           <a:xfrm>
-            <a:off x="841248" y="2606040"/>
-            <a:ext cx="5120640" cy="2926080"/>
+            <a:off x="841248" y="1691640"/>
+            <a:ext cx="10515600" cy="1005840"/>
           </a:xfrm>
           <a:prstGeom prst="roundRect">
             <a:avLst>
@@ -7269,7 +6804,7 @@
             </a:avLst>
           </a:prstGeom>
           <a:solidFill>
-            <a:srgbClr val="F3F5F8"/>
+            <a:srgbClr val="E8EEF6"/>
           </a:solidFill>
           <a:ln>
             <a:noFill/>
@@ -7300,14 +6835,14 @@
       </p:sp>
       <p:sp>
         <p:nvSpPr>
-          <p:cNvPr id="5" name="TextBox 4"/>
+          <p:cNvPr id="4" name="TextBox 3"/>
           <p:cNvSpPr txBox="1"/>
           <p:nvPr/>
         </p:nvSpPr>
         <p:spPr>
           <a:xfrm>
-            <a:off x="1024128" y="2715768"/>
-            <a:ext cx="4754880" cy="2743200"/>
+            <a:off x="1024128" y="1764792"/>
+            <a:ext cx="10149840" cy="868680"/>
           </a:xfrm>
           <a:prstGeom prst="rect">
             <a:avLst/>
@@ -7315,7 +6850,7 @@
           <a:noFill/>
         </p:spPr>
         <p:txBody>
-          <a:bodyPr wrap="square" lIns="36576" rIns="36576" tIns="18288" bIns="18288" anchor="t">
+          <a:bodyPr wrap="square" lIns="36576" rIns="36576" tIns="18288" bIns="18288" anchor="ctr">
             <a:spAutoFit/>
           </a:bodyPr>
           <a:lstStyle/>
@@ -7328,150 +6863,32 @@
                 <a:spcPts val="0"/>
               </a:spcBef>
               <a:spcAft>
-                <a:spcPts val="800"/>
+                <a:spcPts val="600"/>
               </a:spcAft>
               <a:buNone/>
             </a:pPr>
             <a:r>
-              <a:rPr sz="1600" b="1" i="0">
+              <a:rPr sz="1700" b="1" i="0">
                 <a:solidFill>
                   <a:srgbClr val="1F3A5F"/>
                 </a:solidFill>
                 <a:latin typeface="Arial"/>
               </a:rPr>
-              <a:t>P1 · liczba foldów k = 2, 5, 10</a:t>
-            </a:r>
-          </a:p>
-          <a:p>
-            <a:pPr algn="l" marL="219456" indent="-219456">
-              <a:lnSpc>
-                <a:spcPct val="108000"/>
-              </a:lnSpc>
-              <a:spcBef>
-                <a:spcPts val="0"/>
-              </a:spcBef>
-              <a:spcAft>
-                <a:spcPts val="800"/>
-              </a:spcAft>
-              <a:buFont typeface="Arial"/>
-              <a:buChar char="•"/>
-            </a:pPr>
-            <a:r>
-              <a:rPr sz="1450" b="0" i="0">
-                <a:solidFill>
-                  <a:srgbClr val="0B0B0B"/>
-                </a:solidFill>
-                <a:latin typeface="Arial"/>
-              </a:rPr>
-              <a:t>H1: ê_CV zawyża błąd (pesymizm) najbardziej dla k = 2, bo model w foldzie uczy się tylko na n/2 obiektów; dla k = 10 obciążenie bliskie zera.</a:t>
-            </a:r>
-          </a:p>
-          <a:p>
-            <a:pPr algn="l" marL="219456" indent="-219456">
-              <a:lnSpc>
-                <a:spcPct val="108000"/>
-              </a:lnSpc>
-              <a:spcBef>
-                <a:spcPts val="0"/>
-              </a:spcBef>
-              <a:spcAft>
-                <a:spcPts val="800"/>
-              </a:spcAft>
-              <a:buFont typeface="Arial"/>
-              <a:buChar char="•"/>
-            </a:pPr>
-            <a:r>
-              <a:rPr sz="1450" b="0" i="0">
-                <a:solidFill>
-                  <a:srgbClr val="0B0B0B"/>
-                </a:solidFill>
-                <a:latin typeface="Arial"/>
-              </a:rPr>
-              <a:t>H1′: zmienność ê_CV jest największa dla k = 2.</a:t>
-            </a:r>
-          </a:p>
-          <a:p>
-            <a:pPr algn="l" marL="219456" indent="-219456">
-              <a:lnSpc>
-                <a:spcPct val="108000"/>
-              </a:lnSpc>
-              <a:spcBef>
-                <a:spcPts val="0"/>
-              </a:spcBef>
-              <a:spcAft>
-                <a:spcPts val="800"/>
-              </a:spcAft>
-              <a:buFont typeface="Arial"/>
-              <a:buChar char="•"/>
-            </a:pPr>
-            <a:r>
-              <a:rPr sz="1450" b="0" i="0">
-                <a:solidFill>
-                  <a:srgbClr val="0B0B0B"/>
-                </a:solidFill>
-                <a:latin typeface="Arial"/>
-              </a:rPr>
-              <a:t>H1″: efekty silniejsze dla CART (model niestabilny) niż dla GaussianNB (stabilny).</a:t>
-            </a:r>
-          </a:p>
-        </p:txBody>
-      </p:sp>
-      <p:sp>
-        <p:nvSpPr>
-          <p:cNvPr id="6" name="Rounded Rectangle 5"/>
-          <p:cNvSpPr/>
-          <p:nvPr/>
-        </p:nvSpPr>
-        <p:spPr>
-          <a:xfrm>
-            <a:off x="6236208" y="2606040"/>
-            <a:ext cx="5120640" cy="2926080"/>
-          </a:xfrm>
-          <a:prstGeom prst="roundRect">
-            <a:avLst>
-              <a:gd name="adj" fmla="val 7000"/>
-            </a:avLst>
-          </a:prstGeom>
-          <a:solidFill>
-            <a:srgbClr val="E8EEF6"/>
-          </a:solidFill>
-          <a:ln>
-            <a:noFill/>
-          </a:ln>
-          <a:effectLst/>
-        </p:spPr>
-        <p:style>
-          <a:lnRef idx="1">
-            <a:schemeClr val="accent1"/>
-          </a:lnRef>
-          <a:fillRef idx="3">
-            <a:schemeClr val="accent1"/>
-          </a:fillRef>
-          <a:effectRef idx="2">
-            <a:schemeClr val="accent1"/>
-          </a:effectRef>
-          <a:fontRef idx="minor">
-            <a:schemeClr val="lt1"/>
-          </a:fontRef>
-        </p:style>
-        <p:txBody>
-          <a:bodyPr rtlCol="0" anchor="ctr"/>
-          <a:lstStyle/>
-          <a:p>
-            <a:pPr algn="ctr"/>
-          </a:p>
-        </p:txBody>
-      </p:sp>
-      <p:sp>
-        <p:nvSpPr>
-          <p:cNvPr id="7" name="TextBox 6"/>
+              <a:t>Jak liczba części walidacji krzyżowej wpływa na obciążenie i zmienność szacowanego błędu oraz co zmienia stratyfikacja przy niezbalansowanych klasach?</a:t>
+            </a:r>
+          </a:p>
+        </p:txBody>
+      </p:sp>
+      <p:sp>
+        <p:nvSpPr>
+          <p:cNvPr id="5" name="TextBox 4"/>
           <p:cNvSpPr txBox="1"/>
           <p:nvPr/>
         </p:nvSpPr>
         <p:spPr>
           <a:xfrm>
-            <a:off x="6419088" y="2715768"/>
-            <a:ext cx="4754880" cy="2743200"/>
+            <a:off x="841248" y="2926080"/>
+            <a:ext cx="10515600" cy="2743200"/>
           </a:xfrm>
           <a:prstGeom prst="rect">
             <a:avLst/>
@@ -7492,22 +6909,31 @@
                 <a:spcPts val="0"/>
               </a:spcBef>
               <a:spcAft>
-                <a:spcPts val="800"/>
+                <a:spcPts val="1400"/>
               </a:spcAft>
               <a:buNone/>
             </a:pPr>
             <a:r>
-              <a:rPr sz="1600" b="1" i="0">
+              <a:rPr sz="1700" b="1" i="0">
                 <a:solidFill>
                   <a:srgbClr val="1F3A5F"/>
                 </a:solidFill>
                 <a:latin typeface="Arial"/>
               </a:rPr>
-              <a:t>P2 · stratyfikacja przy klasie rzadkiej (10 %)</a:t>
-            </a:r>
-          </a:p>
-          <a:p>
-            <a:pPr algn="l" marL="219456" indent="-219456">
+              <a:t>H1  </a:t>
+            </a:r>
+            <a:r>
+              <a:rPr sz="1700" b="0" i="0">
+                <a:solidFill>
+                  <a:srgbClr val="0B0B0B"/>
+                </a:solidFill>
+                <a:latin typeface="Arial"/>
+              </a:rPr>
+              <a:t>Obciążenie pesymistyczne (CV zawyża błąd), największe dla k = 2, bliskie zera dla k = 10.</a:t>
+            </a:r>
+          </a:p>
+          <a:p>
+            <a:pPr algn="l" marL="0" indent="0">
               <a:lnSpc>
                 <a:spcPct val="108000"/>
               </a:lnSpc>
@@ -7515,23 +6941,31 @@
                 <a:spcPts val="0"/>
               </a:spcBef>
               <a:spcAft>
-                <a:spcPts val="800"/>
+                <a:spcPts val="1400"/>
               </a:spcAft>
-              <a:buFont typeface="Arial"/>
-              <a:buChar char="•"/>
+              <a:buNone/>
             </a:pPr>
             <a:r>
-              <a:rPr sz="1450" b="0" i="0">
+              <a:rPr sz="1700" b="1" i="0">
+                <a:solidFill>
+                  <a:srgbClr val="1F3A5F"/>
+                </a:solidFill>
+                <a:latin typeface="Arial"/>
+              </a:rPr>
+              <a:t>H1′ </a:t>
+            </a:r>
+            <a:r>
+              <a:rPr sz="1700" b="0" i="0">
                 <a:solidFill>
                   <a:srgbClr val="0B0B0B"/>
                 </a:solidFill>
                 <a:latin typeface="Arial"/>
               </a:rPr>
-              <a:t>H2: stratyfikowane 5‑foldowe CV ma mniejszą zmienność niż zwykłe i nie daje foldów bez klasy rzadkiej.</a:t>
-            </a:r>
-          </a:p>
-          <a:p>
-            <a:pPr algn="l" marL="219456" indent="-219456">
+              <a:t>Zmienność największa dla k = 2.</a:t>
+            </a:r>
+          </a:p>
+          <a:p>
+            <a:pPr algn="l" marL="0" indent="0">
               <a:lnSpc>
                 <a:spcPct val="108000"/>
               </a:lnSpc>
@@ -7539,19 +6973,59 @@
                 <a:spcPts val="0"/>
               </a:spcBef>
               <a:spcAft>
-                <a:spcPts val="800"/>
+                <a:spcPts val="1400"/>
               </a:spcAft>
-              <a:buFont typeface="Arial"/>
-              <a:buChar char="•"/>
+              <a:buNone/>
             </a:pPr>
             <a:r>
-              <a:rPr sz="1450" b="0" i="0">
+              <a:rPr sz="1700" b="1" i="0">
+                <a:solidFill>
+                  <a:srgbClr val="1F3A5F"/>
+                </a:solidFill>
+                <a:latin typeface="Arial"/>
+              </a:rPr>
+              <a:t>H1″ </a:t>
+            </a:r>
+            <a:r>
+              <a:rPr sz="1700" b="0" i="0">
                 <a:solidFill>
                   <a:srgbClr val="0B0B0B"/>
                 </a:solidFill>
                 <a:latin typeface="Arial"/>
               </a:rPr>
-              <a:t>H2′: obciążenie podobne — rozmiar treningu w foldzie jest taki sam.</a:t>
+              <a:t>Oba efekty silniejsze dla CART (niestabilny) niż dla GaussianNB (stabilny).</a:t>
+            </a:r>
+          </a:p>
+          <a:p>
+            <a:pPr algn="l" marL="0" indent="0">
+              <a:lnSpc>
+                <a:spcPct val="108000"/>
+              </a:lnSpc>
+              <a:spcBef>
+                <a:spcPts val="0"/>
+              </a:spcBef>
+              <a:spcAft>
+                <a:spcPts val="600"/>
+              </a:spcAft>
+              <a:buNone/>
+            </a:pPr>
+            <a:r>
+              <a:rPr sz="1700" b="1" i="0">
+                <a:solidFill>
+                  <a:srgbClr val="1F3A5F"/>
+                </a:solidFill>
+                <a:latin typeface="Arial"/>
+              </a:rPr>
+              <a:t>H2  </a:t>
+            </a:r>
+            <a:r>
+              <a:rPr sz="1700" b="0" i="0">
+                <a:solidFill>
+                  <a:srgbClr val="0B0B0B"/>
+                </a:solidFill>
+                <a:latin typeface="Arial"/>
+              </a:rPr>
+              <a:t>Stratyfikacja przy klasie rzadkiej: mniejsza zmienność, brak foldów bez klasy rzadkiej, obciążenie podobne.</a:t>
             </a:r>
           </a:p>
         </p:txBody>
@@ -7616,7 +7090,7 @@
         <p:spPr>
           <a:xfrm>
             <a:off x="841248" y="1691640"/>
-            <a:ext cx="10515600" cy="1051560"/>
+            <a:ext cx="10515600" cy="1097280"/>
           </a:xfrm>
           <a:prstGeom prst="roundRect">
             <a:avLst>
@@ -7662,7 +7136,7 @@
         <p:spPr>
           <a:xfrm>
             <a:off x="1024128" y="1764792"/>
-            <a:ext cx="3200400" cy="365760"/>
+            <a:ext cx="4572000" cy="365760"/>
           </a:xfrm>
           <a:prstGeom prst="rect">
             <a:avLst/>
@@ -7694,7 +7168,7 @@
                 </a:solidFill>
                 <a:latin typeface="Arial"/>
               </a:rPr>
-              <a:t>Błąd prawdziwy modelu C</a:t>
+              <a:t>Błąd prawdziwy modelu C (generalizacja)</a:t>
             </a:r>
           </a:p>
         </p:txBody>
@@ -7715,8 +7189,8 @@
         </p:blipFill>
         <p:spPr>
           <a:xfrm>
-            <a:off x="1069848" y="2148840"/>
-            <a:ext cx="2569530" cy="384048"/>
+            <a:off x="1933594" y="2194560"/>
+            <a:ext cx="2753068" cy="411480"/>
           </a:xfrm>
           <a:prstGeom prst="rect">
             <a:avLst/>
@@ -7731,8 +7205,8 @@
         </p:nvSpPr>
         <p:spPr>
           <a:xfrm>
-            <a:off x="4773168" y="1737360"/>
-            <a:ext cx="6400800" cy="960120"/>
+            <a:off x="5961888" y="1737360"/>
+            <a:ext cx="5212080" cy="1005840"/>
           </a:xfrm>
           <a:prstGeom prst="rect">
             <a:avLst/>
@@ -7764,7 +7238,7 @@
                 </a:solidFill>
                 <a:latin typeface="Arial"/>
               </a:rPr>
-              <a:t>Prawdopodobieństwo pomyłki na nowym obiekcie z tego samego rozkładu. Nieznane — przybliżamy je błędem e_test modelu na dużym, niezależnym teście T (N = 10 000).</a:t>
+              <a:t>Nieznany — przybliżamy go przez błąd eₜₑₛₜ: model nauczony na całym D (200 obiektów), zmierzony na niezależnym teście T (10 000 obiektów).</a:t>
             </a:r>
           </a:p>
         </p:txBody>
@@ -7777,8 +7251,8 @@
         </p:nvSpPr>
         <p:spPr>
           <a:xfrm>
-            <a:off x="841248" y="2880360"/>
-            <a:ext cx="10515600" cy="1280160"/>
+            <a:off x="841248" y="2926080"/>
+            <a:ext cx="10515600" cy="1600200"/>
           </a:xfrm>
           <a:prstGeom prst="roundRect">
             <a:avLst>
@@ -7823,8 +7297,8 @@
         </p:nvSpPr>
         <p:spPr>
           <a:xfrm>
-            <a:off x="1024128" y="2953512"/>
-            <a:ext cx="4572000" cy="365760"/>
+            <a:off x="1024128" y="2999232"/>
+            <a:ext cx="5486400" cy="365760"/>
           </a:xfrm>
           <a:prstGeom prst="rect">
             <a:avLst/>
@@ -7856,7 +7330,7 @@
                 </a:solidFill>
                 <a:latin typeface="Arial"/>
               </a:rPr>
-              <a:t>Estymator ê_CV: obciążenie i zmienność</a:t>
+              <a:t>Estymator CV i jego dwa rodzaje błędu</a:t>
             </a:r>
           </a:p>
         </p:txBody>
@@ -7877,8 +7351,8 @@
         </p:blipFill>
         <p:spPr>
           <a:xfrm>
-            <a:off x="1069848" y="3355848"/>
-            <a:ext cx="5016285" cy="457200"/>
+            <a:off x="2402761" y="3429000"/>
+            <a:ext cx="7392572" cy="457200"/>
           </a:xfrm>
           <a:prstGeom prst="rect">
             <a:avLst/>
@@ -7893,8 +7367,8 @@
         </p:nvSpPr>
         <p:spPr>
           <a:xfrm>
-            <a:off x="6876288" y="2926080"/>
-            <a:ext cx="4297680" cy="1188720"/>
+            <a:off x="1024128" y="3977639"/>
+            <a:ext cx="10149840" cy="457200"/>
           </a:xfrm>
           <a:prstGeom prst="rect">
             <a:avLst/>
@@ -7907,7 +7381,7 @@
           </a:bodyPr>
           <a:lstStyle/>
           <a:p>
-            <a:pPr algn="l" marL="0" indent="0">
+            <a:pPr algn="ctr" marL="0" indent="0">
               <a:lnSpc>
                 <a:spcPct val="108000"/>
               </a:lnSpc>
@@ -7920,13 +7394,13 @@
               <a:buNone/>
             </a:pPr>
             <a:r>
-              <a:rPr sz="1400" b="0" i="0">
+              <a:rPr sz="1300" b="0" i="0">
                 <a:solidFill>
                   <a:srgbClr val="52514E"/>
                 </a:solidFill>
                 <a:latin typeface="Arial"/>
               </a:rPr>
-              <a:t>Obciążenie: błąd systematyczny — dodatnie = CV zawyża błąd (pesymizm). Zmienność: rozrzut ê_CV między powtórzeniami. Jedno nie wynika z drugiego.</a:t>
+              <a:t>bias &gt; 0 = pesymizm (CV zawyża błąd)      sd_Δ = odchylenie standardowe różnicy między powtórzeniami = zmienność</a:t>
             </a:r>
           </a:p>
         </p:txBody>
@@ -7939,8 +7413,8 @@
         </p:nvSpPr>
         <p:spPr>
           <a:xfrm>
-            <a:off x="841248" y="4297680"/>
-            <a:ext cx="10515600" cy="1188720"/>
+            <a:off x="841248" y="4709160"/>
+            <a:ext cx="10515600" cy="1005840"/>
           </a:xfrm>
           <a:prstGeom prst="rect">
             <a:avLst/>
@@ -7961,28 +7435,28 @@
                 <a:spcPts val="0"/>
               </a:spcBef>
               <a:spcAft>
-                <a:spcPts val="500"/>
+                <a:spcPts val="700"/>
               </a:spcAft>
               <a:buFont typeface="Arial"/>
               <a:buChar char="•"/>
             </a:pPr>
             <a:r>
-              <a:rPr sz="1400" b="1" i="0">
+              <a:rPr sz="1500" b="1" i="0">
                 <a:solidFill>
                   <a:srgbClr val="0B0B0B"/>
                 </a:solidFill>
                 <a:latin typeface="Arial"/>
               </a:rPr>
-              <a:t>Skąd pesymizm: </a:t>
-            </a:r>
-            <a:r>
-              <a:rPr sz="1400" b="0" i="0">
+              <a:t>Pesymizm: </a:t>
+            </a:r>
+            <a:r>
+              <a:rPr sz="1500" b="0" i="0">
                 <a:solidFill>
                   <a:srgbClr val="0B0B0B"/>
                 </a:solidFill>
                 <a:latin typeface="Arial"/>
               </a:rPr>
-              <a:t>model w foldzie uczy się na n(k−1)/k obiektów, nie na n (k = 2: 100, k = 5: 160, k = 10: 180 z 200). Mniej danych → większy błąd.</a:t>
+              <a:t>model w foldzie uczy się na n(k−1)/k obiektach — k = 2: 100, k = 5: 160, k = 10: 180 z 200.</a:t>
             </a:r>
           </a:p>
           <a:p>
@@ -7994,28 +7468,28 @@
                 <a:spcPts val="0"/>
               </a:spcBef>
               <a:spcAft>
-                <a:spcPts val="500"/>
+                <a:spcPts val="700"/>
               </a:spcAft>
               <a:buFont typeface="Arial"/>
               <a:buChar char="•"/>
             </a:pPr>
             <a:r>
-              <a:rPr sz="1400" b="1" i="0">
+              <a:rPr sz="1500" b="1" i="0">
                 <a:solidFill>
                   <a:srgbClr val="0B0B0B"/>
                 </a:solidFill>
                 <a:latin typeface="Arial"/>
               </a:rPr>
-              <a:t>Skąd zmienność: </a:t>
-            </a:r>
-            <a:r>
-              <a:rPr sz="1400" b="0" i="0">
+              <a:t>Powtórzenie: </a:t>
+            </a:r>
+            <a:r>
+              <a:rPr sz="1500" b="0" i="0">
                 <a:solidFill>
                   <a:srgbClr val="0B0B0B"/>
                 </a:solidFill>
                 <a:latin typeface="Arial"/>
               </a:rPr>
-              <a:t>losowy zbiór treningowy i losowy podział na foldy.</a:t>
+              <a:t>niezależny zbiór Dᵣ, r = 1…30 → 30 różnic; ich średnia = bias, odchylenie standardowe = zmienność.</a:t>
             </a:r>
           </a:p>
           <a:p>
@@ -8033,22 +7507,13 @@
               <a:buChar char="•"/>
             </a:pPr>
             <a:r>
-              <a:rPr sz="1400" b="1" i="0">
+              <a:rPr sz="1500" b="1" i="0">
                 <a:solidFill>
                   <a:srgbClr val="0B0B0B"/>
                 </a:solidFill>
                 <a:latin typeface="Arial"/>
               </a:rPr>
-              <a:t>Jak liczymy: </a:t>
-            </a:r>
-            <a:r>
-              <a:rPr sz="1400" b="0" i="0">
-                <a:solidFill>
-                  <a:srgbClr val="0B0B0B"/>
-                </a:solidFill>
-                <a:latin typeface="Arial"/>
-              </a:rPr>
-              <a:t>30 niezależnych zbiorów D_r → 30 różnic ê_CV,r − e_test,r; ich średnia = obciążenie, odchylenie standardowe = zmienność.</a:t>
+              <a:t>Niska zmienność ≠ małe obciążenie.</a:t>
             </a:r>
           </a:p>
         </p:txBody>
@@ -8120,7 +7585,7 @@
         </p:blipFill>
         <p:spPr>
           <a:xfrm>
-            <a:off x="1115568" y="1691640"/>
+            <a:off x="4732868" y="1691640"/>
             <a:ext cx="2732359" cy="777240"/>
           </a:xfrm>
           <a:prstGeom prst="rect">
@@ -8128,330 +7593,16 @@
           </a:prstGeom>
         </p:spPr>
       </p:pic>
-      <p:graphicFrame>
-        <p:nvGraphicFramePr>
-          <p:cNvPr id="4" name="Table 3"/>
-          <p:cNvGraphicFramePr>
-            <a:graphicFrameLocks noGrp="1"/>
-          </p:cNvGraphicFramePr>
-          <p:nvPr/>
-        </p:nvGraphicFramePr>
-        <p:xfrm>
-          <a:off x="841248" y="2651760"/>
-          <a:ext cx="10515600" cy="2194560"/>
-        </p:xfrm>
-        <a:graphic>
-          <a:graphicData uri="http://schemas.openxmlformats.org/drawingml/2006/table">
-            <a:tbl>
-              <a:tblPr firstRow="1">
-                <a:tableStyleId>{5C22544A-7EE6-4342-B048-85BDC9FD1C3A}</a:tableStyleId>
-              </a:tblPr>
-              <a:tblGrid>
-                <a:gridCol w="2103120"/>
-                <a:gridCol w="8412480"/>
-              </a:tblGrid>
-              <a:tr h="365760">
-                <a:tc>
-                  <a:txBody>
-                    <a:bodyPr/>
-                    <a:lstStyle/>
-                    <a:p>
-                      <a:pPr algn="l"/>
-                      <a:r>
-                        <a:rPr sz="1300" b="1">
-                          <a:solidFill>
-                            <a:srgbClr val="FFFFFF"/>
-                          </a:solidFill>
-                          <a:latin typeface="Arial"/>
-                        </a:rPr>
-                        <a:t>Symbol</a:t>
-                      </a:r>
-                    </a:p>
-                  </a:txBody>
-                  <a:tcPr marL="73152" marR="73152" marT="27432" marB="27432" anchor="ctr">
-                    <a:solidFill>
-                      <a:srgbClr val="1F3A5F"/>
-                    </a:solidFill>
-                  </a:tcPr>
-                </a:tc>
-                <a:tc>
-                  <a:txBody>
-                    <a:bodyPr/>
-                    <a:lstStyle/>
-                    <a:p>
-                      <a:pPr algn="l"/>
-                      <a:r>
-                        <a:rPr sz="1300" b="1">
-                          <a:solidFill>
-                            <a:srgbClr val="FFFFFF"/>
-                          </a:solidFill>
-                          <a:latin typeface="Arial"/>
-                        </a:rPr>
-                        <a:t>Znaczenie</a:t>
-                      </a:r>
-                    </a:p>
-                  </a:txBody>
-                  <a:tcPr marL="73152" marR="73152" marT="27432" marB="27432" anchor="ctr">
-                    <a:solidFill>
-                      <a:srgbClr val="1F3A5F"/>
-                    </a:solidFill>
-                  </a:tcPr>
-                </a:tc>
-              </a:tr>
-              <a:tr h="365760">
-                <a:tc>
-                  <a:txBody>
-                    <a:bodyPr/>
-                    <a:lstStyle/>
-                    <a:p>
-                      <a:pPr algn="l"/>
-                      <a:r>
-                        <a:rPr sz="1300" b="0">
-                          <a:solidFill>
-                            <a:srgbClr val="0B0B0B"/>
-                          </a:solidFill>
-                          <a:latin typeface="Arial"/>
-                        </a:rPr>
-                        <a:t>D = D_1 ∪ … ∪ D_k</a:t>
-                      </a:r>
-                    </a:p>
-                  </a:txBody>
-                  <a:tcPr marL="73152" marR="73152" marT="27432" marB="27432" anchor="ctr">
-                    <a:solidFill>
-                      <a:srgbClr val="FFFFFF"/>
-                    </a:solidFill>
-                  </a:tcPr>
-                </a:tc>
-                <a:tc>
-                  <a:txBody>
-                    <a:bodyPr/>
-                    <a:lstStyle/>
-                    <a:p>
-                      <a:pPr algn="l"/>
-                      <a:r>
-                        <a:rPr sz="1300" b="0">
-                          <a:solidFill>
-                            <a:srgbClr val="0B0B0B"/>
-                          </a:solidFill>
-                          <a:latin typeface="Arial"/>
-                        </a:rPr>
-                        <a:t>zbiór treningowy (n = 200) podzielony losowo na k równych, rozłącznych części (foldów)</a:t>
-                      </a:r>
-                    </a:p>
-                  </a:txBody>
-                  <a:tcPr marL="73152" marR="73152" marT="27432" marB="27432" anchor="ctr">
-                    <a:solidFill>
-                      <a:srgbClr val="FFFFFF"/>
-                    </a:solidFill>
-                  </a:tcPr>
-                </a:tc>
-              </a:tr>
-              <a:tr h="365760">
-                <a:tc>
-                  <a:txBody>
-                    <a:bodyPr/>
-                    <a:lstStyle/>
-                    <a:p>
-                      <a:pPr algn="l"/>
-                      <a:r>
-                        <a:rPr sz="1300" b="0">
-                          <a:solidFill>
-                            <a:srgbClr val="0B0B0B"/>
-                          </a:solidFill>
-                          <a:latin typeface="Arial"/>
-                        </a:rPr>
-                        <a:t>C_−j</a:t>
-                      </a:r>
-                    </a:p>
-                  </a:txBody>
-                  <a:tcPr marL="73152" marR="73152" marT="27432" marB="27432" anchor="ctr">
-                    <a:solidFill>
-                      <a:srgbClr val="F7F8FA"/>
-                    </a:solidFill>
-                  </a:tcPr>
-                </a:tc>
-                <a:tc>
-                  <a:txBody>
-                    <a:bodyPr/>
-                    <a:lstStyle/>
-                    <a:p>
-                      <a:pPr algn="l"/>
-                      <a:r>
-                        <a:rPr sz="1300" b="0">
-                          <a:solidFill>
-                            <a:srgbClr val="0B0B0B"/>
-                          </a:solidFill>
-                          <a:latin typeface="Arial"/>
-                        </a:rPr>
-                        <a:t>model nauczony na wszystkich foldach poza j‑tym, czyli na n(k−1)/k obiektach</a:t>
-                      </a:r>
-                    </a:p>
-                  </a:txBody>
-                  <a:tcPr marL="73152" marR="73152" marT="27432" marB="27432" anchor="ctr">
-                    <a:solidFill>
-                      <a:srgbClr val="F7F8FA"/>
-                    </a:solidFill>
-                  </a:tcPr>
-                </a:tc>
-              </a:tr>
-              <a:tr h="365760">
-                <a:tc>
-                  <a:txBody>
-                    <a:bodyPr/>
-                    <a:lstStyle/>
-                    <a:p>
-                      <a:pPr algn="l"/>
-                      <a:r>
-                        <a:rPr sz="1300" b="0">
-                          <a:solidFill>
-                            <a:srgbClr val="0B0B0B"/>
-                          </a:solidFill>
-                          <a:latin typeface="Arial"/>
-                        </a:rPr>
-                        <a:t>m_j, e_j</a:t>
-                      </a:r>
-                    </a:p>
-                  </a:txBody>
-                  <a:tcPr marL="73152" marR="73152" marT="27432" marB="27432" anchor="ctr">
-                    <a:solidFill>
-                      <a:srgbClr val="FFFFFF"/>
-                    </a:solidFill>
-                  </a:tcPr>
-                </a:tc>
-                <a:tc>
-                  <a:txBody>
-                    <a:bodyPr/>
-                    <a:lstStyle/>
-                    <a:p>
-                      <a:pPr algn="l"/>
-                      <a:r>
-                        <a:rPr sz="1300" b="0">
-                          <a:solidFill>
-                            <a:srgbClr val="0B0B0B"/>
-                          </a:solidFill>
-                          <a:latin typeface="Arial"/>
-                        </a:rPr>
-                        <a:t>liczba pomyłek modelu C_−j na odłożonym foldzie D_j i ich odsetek e_j = m_j / |D_j|</a:t>
-                      </a:r>
-                    </a:p>
-                  </a:txBody>
-                  <a:tcPr marL="73152" marR="73152" marT="27432" marB="27432" anchor="ctr">
-                    <a:solidFill>
-                      <a:srgbClr val="FFFFFF"/>
-                    </a:solidFill>
-                  </a:tcPr>
-                </a:tc>
-              </a:tr>
-              <a:tr h="365760">
-                <a:tc>
-                  <a:txBody>
-                    <a:bodyPr/>
-                    <a:lstStyle/>
-                    <a:p>
-                      <a:pPr algn="l"/>
-                      <a:r>
-                        <a:rPr sz="1300" b="0">
-                          <a:solidFill>
-                            <a:srgbClr val="0B0B0B"/>
-                          </a:solidFill>
-                          <a:latin typeface="Arial"/>
-                        </a:rPr>
-                        <a:t>ê_CV</a:t>
-                      </a:r>
-                    </a:p>
-                  </a:txBody>
-                  <a:tcPr marL="73152" marR="73152" marT="27432" marB="27432" anchor="ctr">
-                    <a:solidFill>
-                      <a:srgbClr val="F7F8FA"/>
-                    </a:solidFill>
-                  </a:tcPr>
-                </a:tc>
-                <a:tc>
-                  <a:txBody>
-                    <a:bodyPr/>
-                    <a:lstStyle/>
-                    <a:p>
-                      <a:pPr algn="l"/>
-                      <a:r>
-                        <a:rPr sz="1300" b="0">
-                          <a:solidFill>
-                            <a:srgbClr val="0B0B0B"/>
-                          </a:solidFill>
-                          <a:latin typeface="Arial"/>
-                        </a:rPr>
-                        <a:t>średnia błędów foldów; przy równych foldach = wszystkie pomyłki / n</a:t>
-                      </a:r>
-                    </a:p>
-                  </a:txBody>
-                  <a:tcPr marL="73152" marR="73152" marT="27432" marB="27432" anchor="ctr">
-                    <a:solidFill>
-                      <a:srgbClr val="F7F8FA"/>
-                    </a:solidFill>
-                  </a:tcPr>
-                </a:tc>
-              </a:tr>
-              <a:tr h="365760">
-                <a:tc>
-                  <a:txBody>
-                    <a:bodyPr/>
-                    <a:lstStyle/>
-                    <a:p>
-                      <a:pPr algn="l"/>
-                      <a:r>
-                        <a:rPr sz="1300" b="0">
-                          <a:solidFill>
-                            <a:srgbClr val="0B0B0B"/>
-                          </a:solidFill>
-                          <a:latin typeface="Arial"/>
-                        </a:rPr>
-                        <a:t>e_test</a:t>
-                      </a:r>
-                    </a:p>
-                  </a:txBody>
-                  <a:tcPr marL="73152" marR="73152" marT="27432" marB="27432" anchor="ctr">
-                    <a:solidFill>
-                      <a:srgbClr val="FFFFFF"/>
-                    </a:solidFill>
-                  </a:tcPr>
-                </a:tc>
-                <a:tc>
-                  <a:txBody>
-                    <a:bodyPr/>
-                    <a:lstStyle/>
-                    <a:p>
-                      <a:pPr algn="l"/>
-                      <a:r>
-                        <a:rPr sz="1300" b="0">
-                          <a:solidFill>
-                            <a:srgbClr val="0B0B0B"/>
-                          </a:solidFill>
-                          <a:latin typeface="Arial"/>
-                        </a:rPr>
-                        <a:t>odsetek pomyłek modelu nauczonego na całym D, zmierzony na teście T (N = 10 000)</a:t>
-                      </a:r>
-                    </a:p>
-                  </a:txBody>
-                  <a:tcPr marL="73152" marR="73152" marT="27432" marB="27432" anchor="ctr">
-                    <a:solidFill>
-                      <a:srgbClr val="FFFFFF"/>
-                    </a:solidFill>
-                  </a:tcPr>
-                </a:tc>
-              </a:tr>
-            </a:tbl>
-          </a:graphicData>
-        </a:graphic>
-      </p:graphicFrame>
-      <p:sp>
-        <p:nvSpPr>
-          <p:cNvPr id="5" name="Rounded Rectangle 4"/>
+      <p:sp>
+        <p:nvSpPr>
+          <p:cNvPr id="4" name="Rounded Rectangle 3"/>
           <p:cNvSpPr/>
           <p:nvPr/>
         </p:nvSpPr>
         <p:spPr>
           <a:xfrm>
-            <a:off x="841248" y="4983480"/>
-            <a:ext cx="10515600" cy="685800"/>
+            <a:off x="841248" y="2651760"/>
+            <a:ext cx="10515600" cy="402336"/>
           </a:xfrm>
           <a:prstGeom prst="roundRect">
             <a:avLst>
@@ -8459,7 +7610,7 @@
             </a:avLst>
           </a:prstGeom>
           <a:solidFill>
-            <a:srgbClr val="E8EEF6"/>
+            <a:srgbClr val="F3F5F8"/>
           </a:solidFill>
           <a:ln>
             <a:noFill/>
@@ -8488,6 +7639,30 @@
           </a:p>
         </p:txBody>
       </p:sp>
+      <p:pic>
+        <p:nvPicPr>
+          <p:cNvPr id="5" name="Picture 4" descr="sym_0.png"/>
+          <p:cNvPicPr>
+            <a:picLocks noChangeAspect="1"/>
+          </p:cNvPicPr>
+          <p:nvPr/>
+        </p:nvPicPr>
+        <p:blipFill>
+          <a:blip r:embed="rId3"/>
+          <a:stretch>
+            <a:fillRect/>
+          </a:stretch>
+        </p:blipFill>
+        <p:spPr>
+          <a:xfrm>
+            <a:off x="1188960" y="2734056"/>
+            <a:ext cx="1773455" cy="274320"/>
+          </a:xfrm>
+          <a:prstGeom prst="rect">
+            <a:avLst/>
+          </a:prstGeom>
+        </p:spPr>
+      </p:pic>
       <p:sp>
         <p:nvSpPr>
           <p:cNvPr id="6" name="TextBox 5"/>
@@ -8496,8 +7671,8 @@
         </p:nvSpPr>
         <p:spPr>
           <a:xfrm>
-            <a:off x="1024128" y="5001768"/>
-            <a:ext cx="10149840" cy="640080"/>
+            <a:off x="3310128" y="2651760"/>
+            <a:ext cx="7863840" cy="402336"/>
           </a:xfrm>
           <a:prstGeom prst="rect">
             <a:avLst/>
@@ -8523,22 +7698,532 @@
               <a:buNone/>
             </a:pPr>
             <a:r>
-              <a:rPr sz="1400" b="1" i="0">
-                <a:solidFill>
-                  <a:srgbClr val="0B0B0B"/>
-                </a:solidFill>
-                <a:latin typeface="Arial"/>
-              </a:rPr>
-              <a:t>Foldy nie są niezależnymi pomiarami: </a:t>
-            </a:r>
-            <a:r>
               <a:rPr sz="1400" b="0" i="0">
                 <a:solidFill>
                   <a:srgbClr val="0B0B0B"/>
                 </a:solidFill>
                 <a:latin typeface="Arial"/>
               </a:rPr>
-              <a:t>zbiory uczące C_−1 i C_−2 mają wspólne (k−2)/(k−1) obiektów (k = 10: 8 z 9). Dlatego powtórzeniem badania jest cały niezależny zbiór D_r, a nie fold.</a:t>
+              <a:t>zbiór treningowy (n = 200) podzielony losowo na k równych, rozłącznych foldów</a:t>
+            </a:r>
+          </a:p>
+        </p:txBody>
+      </p:sp>
+      <p:sp>
+        <p:nvSpPr>
+          <p:cNvPr id="7" name="Rounded Rectangle 6"/>
+          <p:cNvSpPr/>
+          <p:nvPr/>
+        </p:nvSpPr>
+        <p:spPr>
+          <a:xfrm>
+            <a:off x="841248" y="3108960"/>
+            <a:ext cx="10515600" cy="402336"/>
+          </a:xfrm>
+          <a:prstGeom prst="roundRect">
+            <a:avLst>
+              <a:gd name="adj" fmla="val 7000"/>
+            </a:avLst>
+          </a:prstGeom>
+          <a:solidFill>
+            <a:srgbClr val="E8EEF6"/>
+          </a:solidFill>
+          <a:ln>
+            <a:noFill/>
+          </a:ln>
+          <a:effectLst/>
+        </p:spPr>
+        <p:style>
+          <a:lnRef idx="1">
+            <a:schemeClr val="accent1"/>
+          </a:lnRef>
+          <a:fillRef idx="3">
+            <a:schemeClr val="accent1"/>
+          </a:fillRef>
+          <a:effectRef idx="2">
+            <a:schemeClr val="accent1"/>
+          </a:effectRef>
+          <a:fontRef idx="minor">
+            <a:schemeClr val="lt1"/>
+          </a:fontRef>
+        </p:style>
+        <p:txBody>
+          <a:bodyPr rtlCol="0" anchor="ctr"/>
+          <a:lstStyle/>
+          <a:p>
+            <a:pPr algn="ctr"/>
+          </a:p>
+        </p:txBody>
+      </p:sp>
+      <p:pic>
+        <p:nvPicPr>
+          <p:cNvPr id="8" name="Picture 7" descr="sym_1.png"/>
+          <p:cNvPicPr>
+            <a:picLocks noChangeAspect="1"/>
+          </p:cNvPicPr>
+          <p:nvPr/>
+        </p:nvPicPr>
+        <p:blipFill>
+          <a:blip r:embed="rId4"/>
+          <a:stretch>
+            <a:fillRect/>
+          </a:stretch>
+        </p:blipFill>
+        <p:spPr>
+          <a:xfrm>
+            <a:off x="1887518" y="3191256"/>
+            <a:ext cx="376340" cy="274320"/>
+          </a:xfrm>
+          <a:prstGeom prst="rect">
+            <a:avLst/>
+          </a:prstGeom>
+        </p:spPr>
+      </p:pic>
+      <p:sp>
+        <p:nvSpPr>
+          <p:cNvPr id="9" name="TextBox 8"/>
+          <p:cNvSpPr txBox="1"/>
+          <p:nvPr/>
+        </p:nvSpPr>
+        <p:spPr>
+          <a:xfrm>
+            <a:off x="3310128" y="3108960"/>
+            <a:ext cx="7863840" cy="402336"/>
+          </a:xfrm>
+          <a:prstGeom prst="rect">
+            <a:avLst/>
+          </a:prstGeom>
+          <a:noFill/>
+        </p:spPr>
+        <p:txBody>
+          <a:bodyPr wrap="square" lIns="36576" rIns="36576" tIns="18288" bIns="18288" anchor="ctr">
+            <a:spAutoFit/>
+          </a:bodyPr>
+          <a:lstStyle/>
+          <a:p>
+            <a:pPr algn="l" marL="0" indent="0">
+              <a:lnSpc>
+                <a:spcPct val="108000"/>
+              </a:lnSpc>
+              <a:spcBef>
+                <a:spcPts val="0"/>
+              </a:spcBef>
+              <a:spcAft>
+                <a:spcPts val="600"/>
+              </a:spcAft>
+              <a:buNone/>
+            </a:pPr>
+            <a:r>
+              <a:rPr sz="1400" b="0" i="0">
+                <a:solidFill>
+                  <a:srgbClr val="0B0B0B"/>
+                </a:solidFill>
+                <a:latin typeface="Arial"/>
+              </a:rPr>
+              <a:t>model nauczony bez foldu j (na n(k−1)/k obiektach), sprawdzany na odłożonym foldzie Dⱼ</a:t>
+            </a:r>
+          </a:p>
+        </p:txBody>
+      </p:sp>
+      <p:sp>
+        <p:nvSpPr>
+          <p:cNvPr id="10" name="Rounded Rectangle 9"/>
+          <p:cNvSpPr/>
+          <p:nvPr/>
+        </p:nvSpPr>
+        <p:spPr>
+          <a:xfrm>
+            <a:off x="841248" y="3566160"/>
+            <a:ext cx="10515600" cy="402336"/>
+          </a:xfrm>
+          <a:prstGeom prst="roundRect">
+            <a:avLst>
+              <a:gd name="adj" fmla="val 7000"/>
+            </a:avLst>
+          </a:prstGeom>
+          <a:solidFill>
+            <a:srgbClr val="F3F5F8"/>
+          </a:solidFill>
+          <a:ln>
+            <a:noFill/>
+          </a:ln>
+          <a:effectLst/>
+        </p:spPr>
+        <p:style>
+          <a:lnRef idx="1">
+            <a:schemeClr val="accent1"/>
+          </a:lnRef>
+          <a:fillRef idx="3">
+            <a:schemeClr val="accent1"/>
+          </a:fillRef>
+          <a:effectRef idx="2">
+            <a:schemeClr val="accent1"/>
+          </a:effectRef>
+          <a:fontRef idx="minor">
+            <a:schemeClr val="lt1"/>
+          </a:fontRef>
+        </p:style>
+        <p:txBody>
+          <a:bodyPr rtlCol="0" anchor="ctr"/>
+          <a:lstStyle/>
+          <a:p>
+            <a:pPr algn="ctr"/>
+          </a:p>
+        </p:txBody>
+      </p:sp>
+      <p:pic>
+        <p:nvPicPr>
+          <p:cNvPr id="11" name="Picture 10" descr="sym_2.png"/>
+          <p:cNvPicPr>
+            <a:picLocks noChangeAspect="1"/>
+          </p:cNvPicPr>
+          <p:nvPr/>
+        </p:nvPicPr>
+        <p:blipFill>
+          <a:blip r:embed="rId5"/>
+          <a:stretch>
+            <a:fillRect/>
+          </a:stretch>
+        </p:blipFill>
+        <p:spPr>
+          <a:xfrm>
+            <a:off x="1744819" y="3648456"/>
+            <a:ext cx="661737" cy="274320"/>
+          </a:xfrm>
+          <a:prstGeom prst="rect">
+            <a:avLst/>
+          </a:prstGeom>
+        </p:spPr>
+      </p:pic>
+      <p:sp>
+        <p:nvSpPr>
+          <p:cNvPr id="12" name="TextBox 11"/>
+          <p:cNvSpPr txBox="1"/>
+          <p:nvPr/>
+        </p:nvSpPr>
+        <p:spPr>
+          <a:xfrm>
+            <a:off x="3310128" y="3566160"/>
+            <a:ext cx="7863840" cy="402336"/>
+          </a:xfrm>
+          <a:prstGeom prst="rect">
+            <a:avLst/>
+          </a:prstGeom>
+          <a:noFill/>
+        </p:spPr>
+        <p:txBody>
+          <a:bodyPr wrap="square" lIns="36576" rIns="36576" tIns="18288" bIns="18288" anchor="ctr">
+            <a:spAutoFit/>
+          </a:bodyPr>
+          <a:lstStyle/>
+          <a:p>
+            <a:pPr algn="l" marL="0" indent="0">
+              <a:lnSpc>
+                <a:spcPct val="108000"/>
+              </a:lnSpc>
+              <a:spcBef>
+                <a:spcPts val="0"/>
+              </a:spcBef>
+              <a:spcAft>
+                <a:spcPts val="600"/>
+              </a:spcAft>
+              <a:buNone/>
+            </a:pPr>
+            <a:r>
+              <a:rPr sz="1400" b="0" i="0">
+                <a:solidFill>
+                  <a:srgbClr val="0B0B0B"/>
+                </a:solidFill>
+                <a:latin typeface="Arial"/>
+              </a:rPr>
+              <a:t>liczba pomyłek modelu C₋ⱼ na foldzie Dⱼ i ich odsetek (pomyłki / rozmiar foldu)</a:t>
+            </a:r>
+          </a:p>
+        </p:txBody>
+      </p:sp>
+      <p:sp>
+        <p:nvSpPr>
+          <p:cNvPr id="13" name="Rounded Rectangle 12"/>
+          <p:cNvSpPr/>
+          <p:nvPr/>
+        </p:nvSpPr>
+        <p:spPr>
+          <a:xfrm>
+            <a:off x="841248" y="4023360"/>
+            <a:ext cx="10515600" cy="402336"/>
+          </a:xfrm>
+          <a:prstGeom prst="roundRect">
+            <a:avLst>
+              <a:gd name="adj" fmla="val 7000"/>
+            </a:avLst>
+          </a:prstGeom>
+          <a:solidFill>
+            <a:srgbClr val="E8EEF6"/>
+          </a:solidFill>
+          <a:ln>
+            <a:noFill/>
+          </a:ln>
+          <a:effectLst/>
+        </p:spPr>
+        <p:style>
+          <a:lnRef idx="1">
+            <a:schemeClr val="accent1"/>
+          </a:lnRef>
+          <a:fillRef idx="3">
+            <a:schemeClr val="accent1"/>
+          </a:fillRef>
+          <a:effectRef idx="2">
+            <a:schemeClr val="accent1"/>
+          </a:effectRef>
+          <a:fontRef idx="minor">
+            <a:schemeClr val="lt1"/>
+          </a:fontRef>
+        </p:style>
+        <p:txBody>
+          <a:bodyPr rtlCol="0" anchor="ctr"/>
+          <a:lstStyle/>
+          <a:p>
+            <a:pPr algn="ctr"/>
+          </a:p>
+        </p:txBody>
+      </p:sp>
+      <p:pic>
+        <p:nvPicPr>
+          <p:cNvPr id="14" name="Picture 13" descr="sym_3.png"/>
+          <p:cNvPicPr>
+            <a:picLocks noChangeAspect="1"/>
+          </p:cNvPicPr>
+          <p:nvPr/>
+        </p:nvPicPr>
+        <p:blipFill>
+          <a:blip r:embed="rId6"/>
+          <a:stretch>
+            <a:fillRect/>
+          </a:stretch>
+        </p:blipFill>
+        <p:spPr>
+          <a:xfrm>
+            <a:off x="1874760" y="4105656"/>
+            <a:ext cx="401855" cy="274320"/>
+          </a:xfrm>
+          <a:prstGeom prst="rect">
+            <a:avLst/>
+          </a:prstGeom>
+        </p:spPr>
+      </p:pic>
+      <p:sp>
+        <p:nvSpPr>
+          <p:cNvPr id="15" name="TextBox 14"/>
+          <p:cNvSpPr txBox="1"/>
+          <p:nvPr/>
+        </p:nvSpPr>
+        <p:spPr>
+          <a:xfrm>
+            <a:off x="3310128" y="4023360"/>
+            <a:ext cx="7863840" cy="402336"/>
+          </a:xfrm>
+          <a:prstGeom prst="rect">
+            <a:avLst/>
+          </a:prstGeom>
+          <a:noFill/>
+        </p:spPr>
+        <p:txBody>
+          <a:bodyPr wrap="square" lIns="36576" rIns="36576" tIns="18288" bIns="18288" anchor="ctr">
+            <a:spAutoFit/>
+          </a:bodyPr>
+          <a:lstStyle/>
+          <a:p>
+            <a:pPr algn="l" marL="0" indent="0">
+              <a:lnSpc>
+                <a:spcPct val="108000"/>
+              </a:lnSpc>
+              <a:spcBef>
+                <a:spcPts val="0"/>
+              </a:spcBef>
+              <a:spcAft>
+                <a:spcPts val="600"/>
+              </a:spcAft>
+              <a:buNone/>
+            </a:pPr>
+            <a:r>
+              <a:rPr sz="1400" b="0" i="0">
+                <a:solidFill>
+                  <a:srgbClr val="0B0B0B"/>
+                </a:solidFill>
+                <a:latin typeface="Arial"/>
+              </a:rPr>
+              <a:t>średnia błędów foldów; przy równych foldach = wszystkie pomyłki / n</a:t>
+            </a:r>
+          </a:p>
+        </p:txBody>
+      </p:sp>
+      <p:sp>
+        <p:nvSpPr>
+          <p:cNvPr id="16" name="Rounded Rectangle 15"/>
+          <p:cNvSpPr/>
+          <p:nvPr/>
+        </p:nvSpPr>
+        <p:spPr>
+          <a:xfrm>
+            <a:off x="841248" y="4480560"/>
+            <a:ext cx="10515600" cy="402336"/>
+          </a:xfrm>
+          <a:prstGeom prst="roundRect">
+            <a:avLst>
+              <a:gd name="adj" fmla="val 7000"/>
+            </a:avLst>
+          </a:prstGeom>
+          <a:solidFill>
+            <a:srgbClr val="F3F5F8"/>
+          </a:solidFill>
+          <a:ln>
+            <a:noFill/>
+          </a:ln>
+          <a:effectLst/>
+        </p:spPr>
+        <p:style>
+          <a:lnRef idx="1">
+            <a:schemeClr val="accent1"/>
+          </a:lnRef>
+          <a:fillRef idx="3">
+            <a:schemeClr val="accent1"/>
+          </a:fillRef>
+          <a:effectRef idx="2">
+            <a:schemeClr val="accent1"/>
+          </a:effectRef>
+          <a:fontRef idx="minor">
+            <a:schemeClr val="lt1"/>
+          </a:fontRef>
+        </p:style>
+        <p:txBody>
+          <a:bodyPr rtlCol="0" anchor="ctr"/>
+          <a:lstStyle/>
+          <a:p>
+            <a:pPr algn="ctr"/>
+          </a:p>
+        </p:txBody>
+      </p:sp>
+      <p:pic>
+        <p:nvPicPr>
+          <p:cNvPr id="17" name="Picture 16" descr="sym_4.png"/>
+          <p:cNvPicPr>
+            <a:picLocks noChangeAspect="1"/>
+          </p:cNvPicPr>
+          <p:nvPr/>
+        </p:nvPicPr>
+        <p:blipFill>
+          <a:blip r:embed="rId7"/>
+          <a:stretch>
+            <a:fillRect/>
+          </a:stretch>
+        </p:blipFill>
+        <p:spPr>
+          <a:xfrm>
+            <a:off x="1868744" y="4562856"/>
+            <a:ext cx="413886" cy="274320"/>
+          </a:xfrm>
+          <a:prstGeom prst="rect">
+            <a:avLst/>
+          </a:prstGeom>
+        </p:spPr>
+      </p:pic>
+      <p:sp>
+        <p:nvSpPr>
+          <p:cNvPr id="18" name="TextBox 17"/>
+          <p:cNvSpPr txBox="1"/>
+          <p:nvPr/>
+        </p:nvSpPr>
+        <p:spPr>
+          <a:xfrm>
+            <a:off x="3310128" y="4480560"/>
+            <a:ext cx="7863840" cy="402336"/>
+          </a:xfrm>
+          <a:prstGeom prst="rect">
+            <a:avLst/>
+          </a:prstGeom>
+          <a:noFill/>
+        </p:spPr>
+        <p:txBody>
+          <a:bodyPr wrap="square" lIns="36576" rIns="36576" tIns="18288" bIns="18288" anchor="ctr">
+            <a:spAutoFit/>
+          </a:bodyPr>
+          <a:lstStyle/>
+          <a:p>
+            <a:pPr algn="l" marL="0" indent="0">
+              <a:lnSpc>
+                <a:spcPct val="108000"/>
+              </a:lnSpc>
+              <a:spcBef>
+                <a:spcPts val="0"/>
+              </a:spcBef>
+              <a:spcAft>
+                <a:spcPts val="600"/>
+              </a:spcAft>
+              <a:buNone/>
+            </a:pPr>
+            <a:r>
+              <a:rPr sz="1400" b="0" i="0">
+                <a:solidFill>
+                  <a:srgbClr val="0B0B0B"/>
+                </a:solidFill>
+                <a:latin typeface="Arial"/>
+              </a:rPr>
+              <a:t>błąd modelu nauczonego na całym D, zmierzony na teście T (N = 10 000)</a:t>
+            </a:r>
+          </a:p>
+        </p:txBody>
+      </p:sp>
+      <p:sp>
+        <p:nvSpPr>
+          <p:cNvPr id="19" name="TextBox 18"/>
+          <p:cNvSpPr txBox="1"/>
+          <p:nvPr/>
+        </p:nvSpPr>
+        <p:spPr>
+          <a:xfrm>
+            <a:off x="841248" y="5029200"/>
+            <a:ext cx="10515600" cy="548640"/>
+          </a:xfrm>
+          <a:prstGeom prst="rect">
+            <a:avLst/>
+          </a:prstGeom>
+          <a:noFill/>
+        </p:spPr>
+        <p:txBody>
+          <a:bodyPr wrap="square" lIns="36576" rIns="36576" tIns="18288" bIns="18288" anchor="t">
+            <a:spAutoFit/>
+          </a:bodyPr>
+          <a:lstStyle/>
+          <a:p>
+            <a:pPr algn="l" marL="0" indent="0">
+              <a:lnSpc>
+                <a:spcPct val="108000"/>
+              </a:lnSpc>
+              <a:spcBef>
+                <a:spcPts val="0"/>
+              </a:spcBef>
+              <a:spcAft>
+                <a:spcPts val="600"/>
+              </a:spcAft>
+              <a:buNone/>
+            </a:pPr>
+            <a:r>
+              <a:rPr sz="1450" b="1" i="0">
+                <a:solidFill>
+                  <a:srgbClr val="0B0B0B"/>
+                </a:solidFill>
+                <a:latin typeface="Arial"/>
+              </a:rPr>
+              <a:t>Foldy nie są niezależne: </a:t>
+            </a:r>
+            <a:r>
+              <a:rPr sz="1450" b="0" i="0">
+                <a:solidFill>
+                  <a:srgbClr val="0B0B0B"/>
+                </a:solidFill>
+                <a:latin typeface="Arial"/>
+              </a:rPr>
+              <a:t>zbiory uczące C₋₁ i C₋₂ mają wspólne (k−2)/(k−1) obiektów (k = 10: 8 z 9).</a:t>
             </a:r>
           </a:p>
         </p:txBody>
@@ -8678,7 +8363,7 @@
                           </a:solidFill>
                           <a:latin typeface="Arial"/>
                         </a:rPr>
-                        <a:t>Pomyłek</a:t>
+                        <a:t>Pomyłek mⱼ</a:t>
                       </a:r>
                     </a:p>
                   </a:txBody>
@@ -8701,7 +8386,7 @@
                           </a:solidFill>
                           <a:latin typeface="Arial"/>
                         </a:rPr>
-                        <a:t>e_j = pomyłki / obiekty</a:t>
+                        <a:t>eⱼ = mⱼ / 40</a:t>
                       </a:r>
                     </a:p>
                   </a:txBody>
@@ -9334,8 +9019,8 @@
         </p:nvSpPr>
         <p:spPr>
           <a:xfrm>
-            <a:off x="7150608" y="1801368"/>
-            <a:ext cx="4023360" cy="2560320"/>
+            <a:off x="7150608" y="1783080"/>
+            <a:ext cx="4023360" cy="365760"/>
           </a:xfrm>
           <a:prstGeom prst="rect">
             <a:avLst/>
@@ -9347,111 +9032,6 @@
             <a:spAutoFit/>
           </a:bodyPr>
           <a:lstStyle/>
-          <a:p>
-            <a:pPr algn="l" marL="0" indent="0">
-              <a:lnSpc>
-                <a:spcPct val="108000"/>
-              </a:lnSpc>
-              <a:spcBef>
-                <a:spcPts val="0"/>
-              </a:spcBef>
-              <a:spcAft>
-                <a:spcPts val="800"/>
-              </a:spcAft>
-              <a:buNone/>
-            </a:pPr>
-            <a:r>
-              <a:rPr sz="1600" b="1" i="0">
-                <a:solidFill>
-                  <a:srgbClr val="1F3A5F"/>
-                </a:solidFill>
-                <a:latin typeface="Arial"/>
-              </a:rPr>
-              <a:t>Rachunek</a:t>
-            </a:r>
-          </a:p>
-          <a:p>
-            <a:pPr algn="l" marL="0" indent="0">
-              <a:lnSpc>
-                <a:spcPct val="108000"/>
-              </a:lnSpc>
-              <a:spcBef>
-                <a:spcPts val="0"/>
-              </a:spcBef>
-              <a:spcAft>
-                <a:spcPts val="1000"/>
-              </a:spcAft>
-              <a:buNone/>
-            </a:pPr>
-            <a:r>
-              <a:rPr sz="1400" b="0" i="0">
-                <a:solidFill>
-                  <a:srgbClr val="0B0B0B"/>
-                </a:solidFill>
-                <a:latin typeface="Arial"/>
-              </a:rPr>
-              <a:t>ê_CV = (</a:t>
-            </a:r>
-            <a:r>
-              <a:rPr sz="1400" b="0" i="0">
-                <a:solidFill>
-                  <a:srgbClr val="0B0B0B"/>
-                </a:solidFill>
-                <a:latin typeface="Arial"/>
-              </a:rPr>
-              <a:t>0,175 + 0,075 + 0,175 + 0,200 + 0,100</a:t>
-            </a:r>
-            <a:r>
-              <a:rPr sz="1400" b="1" i="0">
-                <a:solidFill>
-                  <a:srgbClr val="0B0B0B"/>
-                </a:solidFill>
-                <a:latin typeface="Arial"/>
-              </a:rPr>
-              <a:t>) / 5 = 0,145</a:t>
-            </a:r>
-          </a:p>
-          <a:p>
-            <a:pPr algn="l" marL="0" indent="0">
-              <a:lnSpc>
-                <a:spcPct val="108000"/>
-              </a:lnSpc>
-              <a:spcBef>
-                <a:spcPts val="0"/>
-              </a:spcBef>
-              <a:spcAft>
-                <a:spcPts val="1000"/>
-              </a:spcAft>
-              <a:buNone/>
-            </a:pPr>
-            <a:r>
-              <a:rPr sz="1400" b="0" i="0">
-                <a:solidFill>
-                  <a:srgbClr val="0B0B0B"/>
-                </a:solidFill>
-                <a:latin typeface="Arial"/>
-              </a:rPr>
-              <a:t>e_test = </a:t>
-            </a:r>
-            <a:r>
-              <a:rPr sz="1400" b="1" i="0">
-                <a:solidFill>
-                  <a:srgbClr val="0B0B0B"/>
-                </a:solidFill>
-                <a:latin typeface="Arial"/>
-              </a:rPr>
-              <a:t>0,1754</a:t>
-            </a:r>
-            <a:r>
-              <a:rPr sz="1400" b="0" i="0">
-                <a:solidFill>
-                  <a:srgbClr val="0B0B0B"/>
-                </a:solidFill>
-                <a:latin typeface="Arial"/>
-              </a:rPr>
-              <a:t> — GaussianNB nauczony na całym D₁ (200 obiektów), sprawdzony na T (10 000 obiektów)</a:t>
-            </a:r>
-          </a:p>
           <a:p>
             <a:pPr algn="l" marL="0" indent="0">
               <a:lnSpc>
@@ -9466,45 +9046,169 @@
               <a:buNone/>
             </a:pPr>
             <a:r>
-              <a:rPr sz="1400" b="0" i="0">
+              <a:rPr sz="1600" b="1" i="0">
                 <a:solidFill>
-                  <a:srgbClr val="0B0B0B"/>
+                  <a:srgbClr val="1F3A5F"/>
                 </a:solidFill>
                 <a:latin typeface="Arial"/>
               </a:rPr>
-              <a:t>ê_CV − e_test = </a:t>
-            </a:r>
-            <a:r>
-              <a:rPr sz="1400" b="1" i="0">
-                <a:solidFill>
-                  <a:srgbClr val="0B0B0B"/>
-                </a:solidFill>
-                <a:latin typeface="Arial"/>
-              </a:rPr>
-              <a:t>−0,0304</a:t>
-            </a:r>
-            <a:r>
-              <a:rPr sz="1400" b="0" i="0">
+              <a:t>Rachunek</a:t>
+            </a:r>
+          </a:p>
+        </p:txBody>
+      </p:sp>
+      <p:pic>
+        <p:nvPicPr>
+          <p:cNvPr id="6" name="Picture 5" descr="f_ex1.png"/>
+          <p:cNvPicPr>
+            <a:picLocks noChangeAspect="1"/>
+          </p:cNvPicPr>
+          <p:nvPr/>
+        </p:nvPicPr>
+        <p:blipFill>
+          <a:blip r:embed="rId2"/>
+          <a:stretch>
+            <a:fillRect/>
+          </a:stretch>
+        </p:blipFill>
+        <p:spPr>
+          <a:xfrm>
+            <a:off x="7104888" y="2148840"/>
+            <a:ext cx="4114789" cy="319617"/>
+          </a:xfrm>
+          <a:prstGeom prst="rect">
+            <a:avLst/>
+          </a:prstGeom>
+        </p:spPr>
+      </p:pic>
+      <p:pic>
+        <p:nvPicPr>
+          <p:cNvPr id="7" name="Picture 6" descr="f_ex1b.png"/>
+          <p:cNvPicPr>
+            <a:picLocks noChangeAspect="1"/>
+          </p:cNvPicPr>
+          <p:nvPr/>
+        </p:nvPicPr>
+        <p:blipFill>
+          <a:blip r:embed="rId3"/>
+          <a:stretch>
+            <a:fillRect/>
+          </a:stretch>
+        </p:blipFill>
+        <p:spPr>
+          <a:xfrm>
+            <a:off x="8215468" y="2606040"/>
+            <a:ext cx="1893639" cy="310896"/>
+          </a:xfrm>
+          <a:prstGeom prst="rect">
+            <a:avLst/>
+          </a:prstGeom>
+        </p:spPr>
+      </p:pic>
+      <p:pic>
+        <p:nvPicPr>
+          <p:cNvPr id="8" name="Picture 7" descr="f_ex2.png"/>
+          <p:cNvPicPr>
+            <a:picLocks noChangeAspect="1"/>
+          </p:cNvPicPr>
+          <p:nvPr/>
+        </p:nvPicPr>
+        <p:blipFill>
+          <a:blip r:embed="rId4"/>
+          <a:stretch>
+            <a:fillRect/>
+          </a:stretch>
+        </p:blipFill>
+        <p:spPr>
+          <a:xfrm>
+            <a:off x="8432773" y="3108960"/>
+            <a:ext cx="1459029" cy="310896"/>
+          </a:xfrm>
+          <a:prstGeom prst="rect">
+            <a:avLst/>
+          </a:prstGeom>
+        </p:spPr>
+      </p:pic>
+      <p:sp>
+        <p:nvSpPr>
+          <p:cNvPr id="9" name="TextBox 8"/>
+          <p:cNvSpPr txBox="1"/>
+          <p:nvPr/>
+        </p:nvSpPr>
+        <p:spPr>
+          <a:xfrm>
+            <a:off x="7150608" y="3447288"/>
+            <a:ext cx="4023360" cy="274320"/>
+          </a:xfrm>
+          <a:prstGeom prst="rect">
+            <a:avLst/>
+          </a:prstGeom>
+          <a:noFill/>
+        </p:spPr>
+        <p:txBody>
+          <a:bodyPr wrap="square" lIns="36576" rIns="36576" tIns="18288" bIns="18288" anchor="t">
+            <a:spAutoFit/>
+          </a:bodyPr>
+          <a:lstStyle/>
+          <a:p>
+            <a:pPr algn="ctr" marL="0" indent="0">
+              <a:lnSpc>
+                <a:spcPct val="108000"/>
+              </a:lnSpc>
+              <a:spcBef>
+                <a:spcPts val="0"/>
+              </a:spcBef>
+              <a:spcAft>
+                <a:spcPts val="600"/>
+              </a:spcAft>
+              <a:buNone/>
+            </a:pPr>
+            <a:r>
+              <a:rPr sz="1200" b="0" i="0">
                 <a:solidFill>
                   <a:srgbClr val="52514E"/>
                 </a:solidFill>
                 <a:latin typeface="Arial"/>
               </a:rPr>
-              <a:t>  (tu: optymizm)</a:t>
-            </a:r>
-          </a:p>
-        </p:txBody>
-      </p:sp>
-      <p:sp>
-        <p:nvSpPr>
-          <p:cNvPr id="6" name="TextBox 5"/>
+              <a:t>(model na całym D₁, test 10 000 obiektów)</a:t>
+            </a:r>
+          </a:p>
+        </p:txBody>
+      </p:sp>
+      <p:pic>
+        <p:nvPicPr>
+          <p:cNvPr id="10" name="Picture 9" descr="f_ex3.png"/>
+          <p:cNvPicPr>
+            <a:picLocks noChangeAspect="1"/>
+          </p:cNvPicPr>
+          <p:nvPr/>
+        </p:nvPicPr>
+        <p:blipFill>
+          <a:blip r:embed="rId5"/>
+          <a:stretch>
+            <a:fillRect/>
+          </a:stretch>
+        </p:blipFill>
+        <p:spPr>
+          <a:xfrm>
+            <a:off x="7872983" y="3840480"/>
+            <a:ext cx="2578608" cy="347472"/>
+          </a:xfrm>
+          <a:prstGeom prst="rect">
+            <a:avLst/>
+          </a:prstGeom>
+        </p:spPr>
+      </p:pic>
+      <p:sp>
+        <p:nvSpPr>
+          <p:cNvPr id="11" name="TextBox 10"/>
           <p:cNvSpPr txBox="1"/>
           <p:nvPr/>
         </p:nvSpPr>
         <p:spPr>
           <a:xfrm>
             <a:off x="841248" y="4526280"/>
-            <a:ext cx="10515600" cy="1005840"/>
+            <a:ext cx="10515600" cy="914400"/>
           </a:xfrm>
           <a:prstGeom prst="rect">
             <a:avLst/>
@@ -9531,13 +9235,13 @@
               <a:buChar char="•"/>
             </a:pPr>
             <a:r>
-              <a:rPr sz="1450" b="0" i="0">
+              <a:rPr sz="1500" b="0" i="0">
                 <a:solidFill>
                   <a:srgbClr val="52514E"/>
                 </a:solidFill>
                 <a:latin typeface="Arial"/>
               </a:rPr>
-              <a:t>Jedna różnica nic nie mówi — zależy od losowego D₁ i losowego podziału. Dopiero średnia i rozrzut 30 takich różnic (po jednej na zbiór D_r) dają obciążenie i zmienność.</a:t>
+              <a:t>Jedna różnica to przypadek — obciążenie i zmienność liczymy z 30 takich różnic (po jednej na zbiór Dᵣ).</a:t>
             </a:r>
           </a:p>
           <a:p>
@@ -9555,13 +9259,13 @@
               <a:buChar char="•"/>
             </a:pPr>
             <a:r>
-              <a:rPr sz="1450" b="0" i="0">
+              <a:rPr sz="1500" b="0" i="0">
                 <a:solidFill>
                   <a:srgbClr val="52514E"/>
                 </a:solidFill>
                 <a:latin typeface="Arial"/>
               </a:rPr>
-              <a:t>Liczby z próby uruchomienia (results/pilot, 2026-10-25). Błąd Bayesa generatora: 15,9 % — niżej zejść się nie da.</a:t>
+              <a:t>Liczby z próby uruchomienia (results/pilot, 2026-10-25).</a:t>
             </a:r>
           </a:p>
         </p:txBody>
@@ -9633,8 +9337,8 @@
         </p:blipFill>
         <p:spPr>
           <a:xfrm>
-            <a:off x="2029968" y="1645920"/>
-            <a:ext cx="8165206" cy="457200"/>
+            <a:off x="933546" y="1645920"/>
+            <a:ext cx="10331003" cy="457200"/>
           </a:xfrm>
           <a:prstGeom prst="rect">
             <a:avLst/>
@@ -9657,8 +9361,8 @@
         </p:blipFill>
         <p:spPr>
           <a:xfrm>
-            <a:off x="2702705" y="2148840"/>
-            <a:ext cx="5961124" cy="2377440"/>
+            <a:off x="2572076" y="2194560"/>
+            <a:ext cx="6190398" cy="2468880"/>
           </a:xfrm>
           <a:prstGeom prst="rect">
             <a:avLst/>
@@ -9673,8 +9377,8 @@
         </p:nvSpPr>
         <p:spPr>
           <a:xfrm>
-            <a:off x="841248" y="4599432"/>
-            <a:ext cx="10515600" cy="1005840"/>
+            <a:off x="841248" y="4754880"/>
+            <a:ext cx="10515600" cy="914400"/>
           </a:xfrm>
           <a:prstGeom prst="rect">
             <a:avLst/>
@@ -9701,7 +9405,7 @@
               <a:buChar char="•"/>
             </a:pPr>
             <a:r>
-              <a:rPr sz="1400" b="1" i="0">
+              <a:rPr sz="1450" b="1" i="0">
                 <a:solidFill>
                   <a:srgbClr val="0B0B0B"/>
                 </a:solidFill>
@@ -9710,46 +9414,13 @@
               <a:t>Generator: </a:t>
             </a:r>
             <a:r>
-              <a:rPr sz="1400" b="0" i="0">
+              <a:rPr sz="1450" b="0" i="0">
                 <a:solidFill>
                   <a:srgbClr val="0B0B0B"/>
                 </a:solidFill>
                 <a:latin typeface="Arial"/>
               </a:rPr>
-              <a:t>dwie klasy normalne, 5 cech informacyjnych + 5 szumu; błąd Bayesa Φ(−δ/2) = 15,9 % (π₁ = 0,5), 7,0 % dla klasy rzadkiej (π₁ = 0,1).</a:t>
-            </a:r>
-          </a:p>
-          <a:p>
-            <a:pPr algn="l" marL="219456" indent="-219456">
-              <a:lnSpc>
-                <a:spcPct val="108000"/>
-              </a:lnSpc>
-              <a:spcBef>
-                <a:spcPts val="0"/>
-              </a:spcBef>
-              <a:spcAft>
-                <a:spcPts val="500"/>
-              </a:spcAft>
-              <a:buFont typeface="Arial"/>
-              <a:buChar char="•"/>
-            </a:pPr>
-            <a:r>
-              <a:rPr sz="1400" b="1" i="0">
-                <a:solidFill>
-                  <a:srgbClr val="0B0B0B"/>
-                </a:solidFill>
-                <a:latin typeface="Arial"/>
-              </a:rPr>
-              <a:t>Powtórzenia: </a:t>
-            </a:r>
-            <a:r>
-              <a:rPr sz="1400" b="0" i="0">
-                <a:solidFill>
-                  <a:srgbClr val="0B0B0B"/>
-                </a:solidFill>
-                <a:latin typeface="Arial"/>
-              </a:rPr>
-              <a:t>R = 30 niezależnych zbiorów D_r po n = 200 obiektów (ziarno 1000 + r).</a:t>
+              <a:t>dwie klasy normalne, 5 cech informacyjnych + 5 szumu; błąd Bayesa 15,9 % (π₁ = 0,5), 7,0 % (π₁ = 0,1).</a:t>
             </a:r>
           </a:p>
           <a:p>
@@ -9767,7 +9438,25 @@
               <a:buChar char="•"/>
             </a:pPr>
             <a:r>
-              <a:rPr sz="1400" b="1" i="0">
+              <a:rPr sz="1450" b="1" i="0">
+                <a:solidFill>
+                  <a:srgbClr val="0B0B0B"/>
+                </a:solidFill>
+                <a:latin typeface="Arial"/>
+              </a:rPr>
+              <a:t>Powtórzenia: </a:t>
+            </a:r>
+            <a:r>
+              <a:rPr sz="1450" b="0" i="0">
+                <a:solidFill>
+                  <a:srgbClr val="0B0B0B"/>
+                </a:solidFill>
+                <a:latin typeface="Arial"/>
+              </a:rPr>
+              <a:t>R = 30 zbiorów Dᵣ po n = 200.   </a:t>
+            </a:r>
+            <a:r>
+              <a:rPr sz="1450" b="1" i="0">
                 <a:solidFill>
                   <a:srgbClr val="0B0B0B"/>
                 </a:solidFill>
@@ -9776,13 +9465,13 @@
               <a:t>Ocena referencyjna: </a:t>
             </a:r>
             <a:r>
-              <a:rPr sz="1400" b="0" i="0">
+              <a:rPr sz="1450" b="0" i="0">
                 <a:solidFill>
                   <a:srgbClr val="0B0B0B"/>
                 </a:solidFill>
                 <a:latin typeface="Arial"/>
               </a:rPr>
-              <a:t>jeden zbiór testowy T, N = 10 000, osobne ziarno — służy tylko do oceny estymatora.</a:t>
+              <a:t>jeden test T, N = 10 000, osobne ziarno, tylko do oceny.</a:t>
             </a:r>
           </a:p>
         </p:txBody>
@@ -9948,7 +9637,7 @@
                 </a:solidFill>
                 <a:latin typeface="Arial"/>
               </a:rPr>
-              <a:t>ziarno 1000 + r dla D_r; ziarno 90001 dla T</a:t>
+              <a:t>ziarno 1000 + r dla Dᵣ; 90001 dla T</a:t>
             </a:r>
           </a:p>
         </p:txBody>
@@ -10043,16 +9732,40 @@
           </a:p>
         </p:txBody>
       </p:sp>
-      <p:sp>
-        <p:nvSpPr>
-          <p:cNvPr id="7" name="TextBox 6"/>
+      <p:pic>
+        <p:nvPicPr>
+          <p:cNvPr id="7" name="Picture 6" descr="box_D_r,\ _35.png"/>
+          <p:cNvPicPr>
+            <a:picLocks noChangeAspect="1"/>
+          </p:cNvPicPr>
+          <p:nvPr/>
+        </p:nvPicPr>
+        <p:blipFill>
+          <a:blip r:embed="rId2"/>
+          <a:stretch>
+            <a:fillRect/>
+          </a:stretch>
+        </p:blipFill>
+        <p:spPr>
+          <a:xfrm>
+            <a:off x="3374136" y="1764792"/>
+            <a:ext cx="1536192" cy="256032"/>
+          </a:xfrm>
+          <a:prstGeom prst="rect">
+            <a:avLst/>
+          </a:prstGeom>
+        </p:spPr>
+      </p:pic>
+      <p:sp>
+        <p:nvSpPr>
+          <p:cNvPr id="8" name="TextBox 7"/>
           <p:cNvSpPr txBox="1"/>
           <p:nvPr/>
         </p:nvSpPr>
         <p:spPr>
           <a:xfrm>
-            <a:off x="3374136" y="1746504"/>
-            <a:ext cx="1883663" cy="685800"/>
+            <a:off x="3374136" y="2075688"/>
+            <a:ext cx="1883663" cy="356615"/>
           </a:xfrm>
           <a:prstGeom prst="rect">
             <a:avLst/>
@@ -10064,29 +9777,6 @@
             <a:spAutoFit/>
           </a:bodyPr>
           <a:lstStyle/>
-          <a:p>
-            <a:pPr algn="l" marL="0" indent="0">
-              <a:lnSpc>
-                <a:spcPct val="108000"/>
-              </a:lnSpc>
-              <a:spcBef>
-                <a:spcPts val="0"/>
-              </a:spcBef>
-              <a:spcAft>
-                <a:spcPts val="200"/>
-              </a:spcAft>
-              <a:buNone/>
-            </a:pPr>
-            <a:r>
-              <a:rPr sz="1300" b="1" i="0">
-                <a:solidFill>
-                  <a:srgbClr val="1F3A5F"/>
-                </a:solidFill>
-                <a:latin typeface="Arial"/>
-              </a:rPr>
-              <a:t>D_r, r = 1…30</a:t>
-            </a:r>
-          </a:p>
           <a:p>
             <a:pPr algn="l" marL="0" indent="0">
               <a:lnSpc>
@@ -10107,14 +9797,14 @@
                 </a:solidFill>
                 <a:latin typeface="Arial"/>
               </a:rPr>
-              <a:t>n = 200 obiektów, klasy 50/50</a:t>
-            </a:r>
-          </a:p>
-        </p:txBody>
-      </p:sp>
-      <p:sp>
-        <p:nvSpPr>
-          <p:cNvPr id="8" name="Right Arrow 7"/>
+              <a:t>n = 200, klasy 50/50</a:t>
+            </a:r>
+          </a:p>
+        </p:txBody>
+      </p:sp>
+      <p:sp>
+        <p:nvSpPr>
+          <p:cNvPr id="9" name="Right Arrow 8"/>
           <p:cNvSpPr/>
           <p:nvPr/>
         </p:nvSpPr>
@@ -10158,7 +9848,7 @@
       </p:sp>
       <p:sp>
         <p:nvSpPr>
-          <p:cNvPr id="9" name="Rounded Rectangle 8"/>
+          <p:cNvPr id="10" name="Rounded Rectangle 9"/>
           <p:cNvSpPr/>
           <p:nvPr/>
         </p:nvSpPr>
@@ -10204,7 +9894,7 @@
       </p:sp>
       <p:sp>
         <p:nvSpPr>
-          <p:cNvPr id="10" name="TextBox 9"/>
+          <p:cNvPr id="11" name="TextBox 10"/>
           <p:cNvSpPr txBox="1"/>
           <p:nvPr/>
         </p:nvSpPr>
@@ -10273,7 +9963,7 @@
       </p:sp>
       <p:sp>
         <p:nvSpPr>
-          <p:cNvPr id="11" name="Right Arrow 10"/>
+          <p:cNvPr id="12" name="Right Arrow 11"/>
           <p:cNvSpPr/>
           <p:nvPr/>
         </p:nvSpPr>
@@ -10317,7 +10007,7 @@
       </p:sp>
       <p:sp>
         <p:nvSpPr>
-          <p:cNvPr id="12" name="Rounded Rectangle 11"/>
+          <p:cNvPr id="13" name="Rounded Rectangle 12"/>
           <p:cNvSpPr/>
           <p:nvPr/>
         </p:nvSpPr>
@@ -10361,16 +10051,40 @@
           </a:p>
         </p:txBody>
       </p:sp>
-      <p:sp>
-        <p:nvSpPr>
-          <p:cNvPr id="13" name="TextBox 12"/>
+      <p:pic>
+        <p:nvPicPr>
+          <p:cNvPr id="14" name="Picture 13" descr="box_\hat e_98.png"/>
+          <p:cNvPicPr>
+            <a:picLocks noChangeAspect="1"/>
+          </p:cNvPicPr>
+          <p:nvPr/>
+        </p:nvPicPr>
+        <p:blipFill>
+          <a:blip r:embed="rId3"/>
+          <a:stretch>
+            <a:fillRect/>
+          </a:stretch>
+        </p:blipFill>
+        <p:spPr>
+          <a:xfrm>
+            <a:off x="9134855" y="1764792"/>
+            <a:ext cx="570974" cy="256032"/>
+          </a:xfrm>
+          <a:prstGeom prst="rect">
+            <a:avLst/>
+          </a:prstGeom>
+        </p:spPr>
+      </p:pic>
+      <p:sp>
+        <p:nvSpPr>
+          <p:cNvPr id="15" name="TextBox 14"/>
           <p:cNvSpPr txBox="1"/>
           <p:nvPr/>
         </p:nvSpPr>
         <p:spPr>
           <a:xfrm>
-            <a:off x="9134855" y="1746504"/>
-            <a:ext cx="2112263" cy="685800"/>
+            <a:off x="9134855" y="2075688"/>
+            <a:ext cx="2112263" cy="356615"/>
           </a:xfrm>
           <a:prstGeom prst="rect">
             <a:avLst/>
@@ -10382,29 +10096,6 @@
             <a:spAutoFit/>
           </a:bodyPr>
           <a:lstStyle/>
-          <a:p>
-            <a:pPr algn="l" marL="0" indent="0">
-              <a:lnSpc>
-                <a:spcPct val="108000"/>
-              </a:lnSpc>
-              <a:spcBef>
-                <a:spcPts val="0"/>
-              </a:spcBef>
-              <a:spcAft>
-                <a:spcPts val="200"/>
-              </a:spcAft>
-              <a:buNone/>
-            </a:pPr>
-            <a:r>
-              <a:rPr sz="1300" b="1" i="0">
-                <a:solidFill>
-                  <a:srgbClr val="1F3A5F"/>
-                </a:solidFill>
-                <a:latin typeface="Arial"/>
-              </a:rPr>
-              <a:t>ê_CV,r,k</a:t>
-            </a:r>
-          </a:p>
           <a:p>
             <a:pPr algn="l" marL="0" indent="0">
               <a:lnSpc>
@@ -10432,7 +10123,7 @@
       </p:sp>
       <p:sp>
         <p:nvSpPr>
-          <p:cNvPr id="14" name="Down Arrow 13"/>
+          <p:cNvPr id="16" name="Down Arrow 15"/>
           <p:cNvSpPr/>
           <p:nvPr/>
         </p:nvSpPr>
@@ -10476,7 +10167,7 @@
       </p:sp>
       <p:sp>
         <p:nvSpPr>
-          <p:cNvPr id="15" name="Rounded Rectangle 14"/>
+          <p:cNvPr id="17" name="Rounded Rectangle 16"/>
           <p:cNvSpPr/>
           <p:nvPr/>
         </p:nvSpPr>
@@ -10522,7 +10213,7 @@
       </p:sp>
       <p:sp>
         <p:nvSpPr>
-          <p:cNvPr id="16" name="TextBox 15"/>
+          <p:cNvPr id="18" name="TextBox 17"/>
           <p:cNvSpPr txBox="1"/>
           <p:nvPr/>
         </p:nvSpPr>
@@ -10561,7 +10252,7 @@
                 </a:solidFill>
                 <a:latin typeface="Arial"/>
               </a:rPr>
-              <a:t>Model na całym D_r</a:t>
+              <a:t>Model na całym Dᵣ</a:t>
             </a:r>
           </a:p>
           <a:p>
@@ -10591,7 +10282,7 @@
       </p:sp>
       <p:sp>
         <p:nvSpPr>
-          <p:cNvPr id="17" name="Right Arrow 16"/>
+          <p:cNvPr id="19" name="Right Arrow 18"/>
           <p:cNvSpPr/>
           <p:nvPr/>
         </p:nvSpPr>
@@ -10635,7 +10326,7 @@
       </p:sp>
       <p:sp>
         <p:nvSpPr>
-          <p:cNvPr id="18" name="Rounded Rectangle 17"/>
+          <p:cNvPr id="20" name="Rounded Rectangle 19"/>
           <p:cNvSpPr/>
           <p:nvPr/>
         </p:nvSpPr>
@@ -10681,7 +10372,7 @@
       </p:sp>
       <p:sp>
         <p:nvSpPr>
-          <p:cNvPr id="19" name="TextBox 18"/>
+          <p:cNvPr id="21" name="TextBox 20"/>
           <p:cNvSpPr txBox="1"/>
           <p:nvPr/>
         </p:nvSpPr>
@@ -10743,14 +10434,14 @@
                 </a:solidFill>
                 <a:latin typeface="Arial"/>
               </a:rPr>
-              <a:t>N = 10 000, ten sam generator; tylko do oceny</a:t>
-            </a:r>
-          </a:p>
-        </p:txBody>
-      </p:sp>
-      <p:sp>
-        <p:nvSpPr>
-          <p:cNvPr id="20" name="Right Arrow 19"/>
+              <a:t>N = 10 000; tylko do oceny</a:t>
+            </a:r>
+          </a:p>
+        </p:txBody>
+      </p:sp>
+      <p:sp>
+        <p:nvSpPr>
+          <p:cNvPr id="22" name="Right Arrow 21"/>
           <p:cNvSpPr/>
           <p:nvPr/>
         </p:nvSpPr>
@@ -10794,7 +10485,7 @@
       </p:sp>
       <p:sp>
         <p:nvSpPr>
-          <p:cNvPr id="21" name="Rounded Rectangle 20"/>
+          <p:cNvPr id="23" name="Rounded Rectangle 22"/>
           <p:cNvSpPr/>
           <p:nvPr/>
         </p:nvSpPr>
@@ -10838,16 +10529,40 @@
           </a:p>
         </p:txBody>
       </p:sp>
-      <p:sp>
-        <p:nvSpPr>
-          <p:cNvPr id="22" name="TextBox 21"/>
+      <p:pic>
+        <p:nvPicPr>
+          <p:cNvPr id="24" name="Picture 23" descr="box_e_{tes_98.png"/>
+          <p:cNvPicPr>
+            <a:picLocks noChangeAspect="1"/>
+          </p:cNvPicPr>
+          <p:nvPr/>
+        </p:nvPicPr>
+        <p:blipFill>
+          <a:blip r:embed="rId4"/>
+          <a:stretch>
+            <a:fillRect/>
+          </a:stretch>
+        </p:blipFill>
+        <p:spPr>
+          <a:xfrm>
+            <a:off x="9134855" y="3044952"/>
+            <a:ext cx="516941" cy="256032"/>
+          </a:xfrm>
+          <a:prstGeom prst="rect">
+            <a:avLst/>
+          </a:prstGeom>
+        </p:spPr>
+      </p:pic>
+      <p:sp>
+        <p:nvSpPr>
+          <p:cNvPr id="25" name="TextBox 24"/>
           <p:cNvSpPr txBox="1"/>
           <p:nvPr/>
         </p:nvSpPr>
         <p:spPr>
           <a:xfrm>
-            <a:off x="9134855" y="3026664"/>
-            <a:ext cx="2112263" cy="685800"/>
+            <a:off x="9134855" y="3355848"/>
+            <a:ext cx="2112263" cy="356615"/>
           </a:xfrm>
           <a:prstGeom prst="rect">
             <a:avLst/>
@@ -10859,29 +10574,6 @@
             <a:spAutoFit/>
           </a:bodyPr>
           <a:lstStyle/>
-          <a:p>
-            <a:pPr algn="l" marL="0" indent="0">
-              <a:lnSpc>
-                <a:spcPct val="108000"/>
-              </a:lnSpc>
-              <a:spcBef>
-                <a:spcPts val="0"/>
-              </a:spcBef>
-              <a:spcAft>
-                <a:spcPts val="200"/>
-              </a:spcAft>
-              <a:buNone/>
-            </a:pPr>
-            <a:r>
-              <a:rPr sz="1300" b="1" i="0">
-                <a:solidFill>
-                  <a:srgbClr val="1F3A5F"/>
-                </a:solidFill>
-                <a:latin typeface="Arial"/>
-              </a:rPr>
-              <a:t>e_test,r</a:t>
-            </a:r>
-          </a:p>
           <a:p>
             <a:pPr algn="l" marL="0" indent="0">
               <a:lnSpc>
@@ -10909,7 +10601,7 @@
       </p:sp>
       <p:sp>
         <p:nvSpPr>
-          <p:cNvPr id="23" name="Down Arrow 22"/>
+          <p:cNvPr id="26" name="Down Arrow 25"/>
           <p:cNvSpPr/>
           <p:nvPr/>
         </p:nvSpPr>
@@ -10953,7 +10645,7 @@
       </p:sp>
       <p:sp>
         <p:nvSpPr>
-          <p:cNvPr id="24" name="Rounded Rectangle 23"/>
+          <p:cNvPr id="27" name="Rounded Rectangle 26"/>
           <p:cNvSpPr/>
           <p:nvPr/>
         </p:nvSpPr>
@@ -10997,16 +10689,40 @@
           </a:p>
         </p:txBody>
       </p:sp>
-      <p:sp>
-        <p:nvSpPr>
-          <p:cNvPr id="25" name="TextBox 24"/>
+      <p:pic>
+        <p:nvPicPr>
+          <p:cNvPr id="28" name="Picture 27" descr="f_delta.png"/>
+          <p:cNvPicPr>
+            <a:picLocks noChangeAspect="1"/>
+          </p:cNvPicPr>
+          <p:nvPr/>
+        </p:nvPicPr>
+        <p:blipFill>
+          <a:blip r:embed="rId5"/>
+          <a:stretch>
+            <a:fillRect/>
+          </a:stretch>
+        </p:blipFill>
+        <p:spPr>
+          <a:xfrm>
+            <a:off x="1069848" y="4334255"/>
+            <a:ext cx="2401777" cy="384048"/>
+          </a:xfrm>
+          <a:prstGeom prst="rect">
+            <a:avLst/>
+          </a:prstGeom>
+        </p:spPr>
+      </p:pic>
+      <p:sp>
+        <p:nvSpPr>
+          <p:cNvPr id="29" name="TextBox 28"/>
           <p:cNvSpPr txBox="1"/>
           <p:nvPr/>
         </p:nvSpPr>
         <p:spPr>
           <a:xfrm>
-            <a:off x="1024128" y="4206240"/>
-            <a:ext cx="10149840" cy="694944"/>
+            <a:off x="4681728" y="4206240"/>
+            <a:ext cx="6492240" cy="694944"/>
           </a:xfrm>
           <a:prstGeom prst="rect">
             <a:avLst/>
@@ -11032,36 +10748,27 @@
               <a:buNone/>
             </a:pPr>
             <a:r>
-              <a:rPr sz="1400" b="1" i="0">
+              <a:rPr sz="1450" b="0" i="0">
                 <a:solidFill>
                   <a:srgbClr val="0B0B0B"/>
                 </a:solidFill>
                 <a:latin typeface="Arial"/>
               </a:rPr>
-              <a:t>Δ_r = ê_CV,r − e_test,r</a:t>
-            </a:r>
-            <a:r>
-              <a:rPr sz="1400" b="0" i="0">
-                <a:solidFill>
-                  <a:srgbClr val="0B0B0B"/>
-                </a:solidFill>
-                <a:latin typeface="Arial"/>
-              </a:rPr>
-              <a:t>   →   dla każdego k i modelu 30 wartości Δ: średnia = obciążenie, odchylenie standardowe = zmienność</a:t>
-            </a:r>
-          </a:p>
-        </p:txBody>
-      </p:sp>
-      <p:sp>
-        <p:nvSpPr>
-          <p:cNvPr id="26" name="TextBox 25"/>
+              <a:t>→ 30 wartości dla każdego k i modelu: średnia = obciążenie, odchylenie standardowe = zmienność</a:t>
+            </a:r>
+          </a:p>
+        </p:txBody>
+      </p:sp>
+      <p:sp>
+        <p:nvSpPr>
+          <p:cNvPr id="30" name="TextBox 29"/>
           <p:cNvSpPr txBox="1"/>
           <p:nvPr/>
         </p:nvSpPr>
         <p:spPr>
           <a:xfrm>
-            <a:off x="841248" y="5029200"/>
-            <a:ext cx="10515600" cy="731520"/>
+            <a:off x="841248" y="5074920"/>
+            <a:ext cx="10515600" cy="548640"/>
           </a:xfrm>
           <a:prstGeom prst="rect">
             <a:avLst/>
@@ -11102,7 +10809,7 @@
                 </a:solidFill>
                 <a:latin typeface="Arial"/>
               </a:rPr>
-              <a:t>GaussianNB() i CART = DecisionTreeClassifier(random_state=0), parametry domyślne scikit‑learn 1.8.0. </a:t>
+              <a:t>GaussianNB, CART (DecisionTreeClassifier, domyślne).   </a:t>
             </a:r>
             <a:r>
               <a:rPr sz="1400" b="1" i="0">
@@ -11120,7 +10827,16 @@
                 </a:solidFill>
                 <a:latin typeface="Arial"/>
               </a:rPr>
-              <a:t>odsetek pomyłek. </a:t>
+              <a:t>odsetek pomyłek.   </a:t>
+            </a:r>
+            <a:r>
+              <a:rPr sz="1400" b="1" i="0">
+                <a:solidFill>
+                  <a:srgbClr val="52514E"/>
+                </a:solidFill>
+                <a:latin typeface="Arial"/>
+              </a:rPr>
+              <a:t>Utrwalone w: </a:t>
             </a:r>
             <a:r>
               <a:rPr sz="1400" b="0" i="0">
@@ -11129,25 +10845,7 @@
                 </a:solidFill>
                 <a:latin typeface="Arial"/>
               </a:rPr>
-              <a:t>Ziarna, rozmiary i k utrwalone w </a:t>
-            </a:r>
-            <a:r>
-              <a:rPr sz="1400" b="1" i="0">
-                <a:solidFill>
-                  <a:srgbClr val="52514E"/>
-                </a:solidFill>
-                <a:latin typeface="Arial"/>
-              </a:rPr>
               <a:t>cvbias/protocol.py</a:t>
-            </a:r>
-            <a:r>
-              <a:rPr sz="1400" b="0" i="0">
-                <a:solidFill>
-                  <a:srgbClr val="52514E"/>
-                </a:solidFill>
-                <a:latin typeface="Arial"/>
-              </a:rPr>
-              <a:t>.</a:t>
             </a:r>
           </a:p>
         </p:txBody>
@@ -11279,7 +10977,7 @@
                 <a:spcPts val="0"/>
               </a:spcBef>
               <a:spcAft>
-                <a:spcPts val="800"/>
+                <a:spcPts val="1000"/>
               </a:spcAft>
               <a:buNone/>
             </a:pPr>
@@ -11302,19 +11000,19 @@
                 <a:spcPts val="0"/>
               </a:spcBef>
               <a:spcAft>
-                <a:spcPts val="800"/>
+                <a:spcPts val="1000"/>
               </a:spcAft>
               <a:buFont typeface="Arial"/>
               <a:buChar char="•"/>
             </a:pPr>
             <a:r>
-              <a:rPr sz="1450" b="0" i="0">
+              <a:rPr sz="1500" b="0" i="0">
                 <a:solidFill>
                   <a:srgbClr val="0B0B0B"/>
                 </a:solidFill>
                 <a:latin typeface="Arial"/>
               </a:rPr>
-              <a:t>Ten sam generator z π₁ = 0,1: ok. 20 obiektów klasy rzadkiej na 200; osobne 30 zbiorów D_r i osobny test T′ (N = 10 000).</a:t>
+              <a:t>Generator z π₁ = 0,1 → ok. 20 obiektów klasy rzadkiej na 200; 30 zbiorów, osobny test T′.</a:t>
             </a:r>
           </a:p>
           <a:p>
@@ -11326,19 +11024,19 @@
                 <a:spcPts val="0"/>
               </a:spcBef>
               <a:spcAft>
-                <a:spcPts val="800"/>
+                <a:spcPts val="1000"/>
               </a:spcAft>
               <a:buFont typeface="Arial"/>
               <a:buChar char="•"/>
             </a:pPr>
             <a:r>
-              <a:rPr sz="1450" b="0" i="0">
+              <a:rPr sz="1500" b="0" i="0">
                 <a:solidFill>
                   <a:srgbClr val="0B0B0B"/>
                 </a:solidFill>
                 <a:latin typeface="Arial"/>
               </a:rPr>
-              <a:t>Na tym samym D_r: KFold(5) i StratifiedKFold(5) z tym samym ziarnem — różni się tylko przydział obiektów do foldów.</a:t>
+              <a:t>Na tym samym Dᵣ: KFold(5) i StratifiedKFold(5), to samo ziarno.</a:t>
             </a:r>
           </a:p>
           <a:p>
@@ -11350,13 +11048,13 @@
                 <a:spcPts val="0"/>
               </a:spcBef>
               <a:spcAft>
-                <a:spcPts val="800"/>
+                <a:spcPts val="1000"/>
               </a:spcAft>
               <a:buFont typeface="Arial"/>
               <a:buChar char="•"/>
             </a:pPr>
             <a:r>
-              <a:rPr sz="1450" b="0" i="0">
+              <a:rPr sz="1500" b="0" i="0">
                 <a:solidFill>
                   <a:srgbClr val="0B0B0B"/>
                 </a:solidFill>
@@ -11380,13 +11078,13 @@
               <a:buChar char="•"/>
             </a:pPr>
             <a:r>
-              <a:rPr sz="1450" b="1" i="0">
+              <a:rPr sz="1500" b="1" i="0">
                 <a:solidFill>
                   <a:srgbClr val="0B0B0B"/>
                 </a:solidFill>
                 <a:latin typeface="Arial"/>
               </a:rPr>
-              <a:t>Fold bez klasy rzadkiej → czułość nieokreślona: zapisujemy jako brak wyniku z powodem.</a:t>
+              <a:t>Fold bez klasy rzadkiej → czułość nieokreślona → zapis jako brak wyniku z powodem.</a:t>
             </a:r>
           </a:p>
         </p:txBody>
@@ -11432,7 +11130,7 @@
                 </a:solidFill>
                 <a:latin typeface="Arial"/>
               </a:rPr>
-              <a:t>Próba uruchomienia, D₁ (24 obiektów klasy rzadkiej na 200), foldy po 40</a:t>
+              <a:t>Próba: D₁ (24 obiektów klasy rzadkiej na 200), foldy po 40</a:t>
             </a:r>
           </a:p>
         </p:txBody>
@@ -11446,8 +11144,8 @@
           <p:nvPr/>
         </p:nvGraphicFramePr>
         <p:xfrm>
-          <a:off x="6236208" y="2194560"/>
-          <a:ext cx="5120640" cy="2194560"/>
+          <a:off x="6236208" y="2148840"/>
+          <a:ext cx="5120640" cy="2304288"/>
         </p:xfrm>
         <a:graphic>
           <a:graphicData uri="http://schemas.openxmlformats.org/drawingml/2006/table">
@@ -11460,7 +11158,7 @@
                 <a:gridCol w="2194560"/>
                 <a:gridCol w="2194560"/>
               </a:tblGrid>
-              <a:tr h="365760">
+              <a:tr h="384048">
                 <a:tc>
                   <a:txBody>
                     <a:bodyPr/>
@@ -11468,7 +11166,7 @@
                     <a:p>
                       <a:pPr algn="ctr"/>
                       <a:r>
-                        <a:rPr sz="1300" b="1">
+                        <a:rPr sz="1400" b="1">
                           <a:solidFill>
                             <a:srgbClr val="FFFFFF"/>
                           </a:solidFill>
@@ -11491,13 +11189,13 @@
                     <a:p>
                       <a:pPr algn="ctr"/>
                       <a:r>
-                        <a:rPr sz="1300" b="1">
+                        <a:rPr sz="1400" b="1">
                           <a:solidFill>
                             <a:srgbClr val="FFFFFF"/>
                           </a:solidFill>
                           <a:latin typeface="Arial"/>
                         </a:rPr>
-                        <a:t>KFold: klasa rzadka w foldzie</a:t>
+                        <a:t>KFold: klasa rzadka</a:t>
                       </a:r>
                     </a:p>
                   </a:txBody>
@@ -11514,13 +11212,13 @@
                     <a:p>
                       <a:pPr algn="ctr"/>
                       <a:r>
-                        <a:rPr sz="1300" b="1">
+                        <a:rPr sz="1400" b="1">
                           <a:solidFill>
                             <a:srgbClr val="FFFFFF"/>
                           </a:solidFill>
                           <a:latin typeface="Arial"/>
                         </a:rPr>
-                        <a:t>Stratified: klasa rzadka w foldzie</a:t>
+                        <a:t>Stratified: klasa rzadka</a:t>
                       </a:r>
                     </a:p>
                   </a:txBody>
@@ -11531,7 +11229,7 @@
                   </a:tcPr>
                 </a:tc>
               </a:tr>
-              <a:tr h="365760">
+              <a:tr h="384048">
                 <a:tc>
                   <a:txBody>
                     <a:bodyPr/>
@@ -11539,7 +11237,7 @@
                     <a:p>
                       <a:pPr algn="ctr"/>
                       <a:r>
-                        <a:rPr sz="1300" b="0">
+                        <a:rPr sz="1400" b="0">
                           <a:solidFill>
                             <a:srgbClr val="0B0B0B"/>
                           </a:solidFill>
@@ -11562,7 +11260,7 @@
                     <a:p>
                       <a:pPr algn="ctr"/>
                       <a:r>
-                        <a:rPr sz="1300" b="0">
+                        <a:rPr sz="1400" b="0">
                           <a:solidFill>
                             <a:srgbClr val="0B0B0B"/>
                           </a:solidFill>
@@ -11585,7 +11283,7 @@
                     <a:p>
                       <a:pPr algn="ctr"/>
                       <a:r>
-                        <a:rPr sz="1300" b="0">
+                        <a:rPr sz="1400" b="0">
                           <a:solidFill>
                             <a:srgbClr val="0B0B0B"/>
                           </a:solidFill>
@@ -11602,7 +11300,7 @@
                   </a:tcPr>
                 </a:tc>
               </a:tr>
-              <a:tr h="365760">
+              <a:tr h="384048">
                 <a:tc>
                   <a:txBody>
                     <a:bodyPr/>
@@ -11610,7 +11308,7 @@
                     <a:p>
                       <a:pPr algn="ctr"/>
                       <a:r>
-                        <a:rPr sz="1300" b="0">
+                        <a:rPr sz="1400" b="0">
                           <a:solidFill>
                             <a:srgbClr val="0B0B0B"/>
                           </a:solidFill>
@@ -11633,7 +11331,7 @@
                     <a:p>
                       <a:pPr algn="ctr"/>
                       <a:r>
-                        <a:rPr sz="1300" b="0">
+                        <a:rPr sz="1400" b="0">
                           <a:solidFill>
                             <a:srgbClr val="0B0B0B"/>
                           </a:solidFill>
@@ -11656,7 +11354,7 @@
                     <a:p>
                       <a:pPr algn="ctr"/>
                       <a:r>
-                        <a:rPr sz="1300" b="0">
+                        <a:rPr sz="1400" b="0">
                           <a:solidFill>
                             <a:srgbClr val="0B0B0B"/>
                           </a:solidFill>
@@ -11673,7 +11371,7 @@
                   </a:tcPr>
                 </a:tc>
               </a:tr>
-              <a:tr h="365760">
+              <a:tr h="384048">
                 <a:tc>
                   <a:txBody>
                     <a:bodyPr/>
@@ -11681,7 +11379,7 @@
                     <a:p>
                       <a:pPr algn="ctr"/>
                       <a:r>
-                        <a:rPr sz="1300" b="0">
+                        <a:rPr sz="1400" b="0">
                           <a:solidFill>
                             <a:srgbClr val="0B0B0B"/>
                           </a:solidFill>
@@ -11704,7 +11402,7 @@
                     <a:p>
                       <a:pPr algn="ctr"/>
                       <a:r>
-                        <a:rPr sz="1300" b="0">
+                        <a:rPr sz="1400" b="0">
                           <a:solidFill>
                             <a:srgbClr val="0B0B0B"/>
                           </a:solidFill>
@@ -11727,7 +11425,7 @@
                     <a:p>
                       <a:pPr algn="ctr"/>
                       <a:r>
-                        <a:rPr sz="1300" b="0">
+                        <a:rPr sz="1400" b="0">
                           <a:solidFill>
                             <a:srgbClr val="0B0B0B"/>
                           </a:solidFill>
@@ -11744,7 +11442,7 @@
                   </a:tcPr>
                 </a:tc>
               </a:tr>
-              <a:tr h="365760">
+              <a:tr h="384048">
                 <a:tc>
                   <a:txBody>
                     <a:bodyPr/>
@@ -11752,7 +11450,7 @@
                     <a:p>
                       <a:pPr algn="ctr"/>
                       <a:r>
-                        <a:rPr sz="1300" b="0">
+                        <a:rPr sz="1400" b="0">
                           <a:solidFill>
                             <a:srgbClr val="0B0B0B"/>
                           </a:solidFill>
@@ -11775,7 +11473,7 @@
                     <a:p>
                       <a:pPr algn="ctr"/>
                       <a:r>
-                        <a:rPr sz="1300" b="0">
+                        <a:rPr sz="1400" b="0">
                           <a:solidFill>
                             <a:srgbClr val="0B0B0B"/>
                           </a:solidFill>
@@ -11798,7 +11496,7 @@
                     <a:p>
                       <a:pPr algn="ctr"/>
                       <a:r>
-                        <a:rPr sz="1300" b="0">
+                        <a:rPr sz="1400" b="0">
                           <a:solidFill>
                             <a:srgbClr val="0B0B0B"/>
                           </a:solidFill>
@@ -11815,7 +11513,7 @@
                   </a:tcPr>
                 </a:tc>
               </a:tr>
-              <a:tr h="365760">
+              <a:tr h="384048">
                 <a:tc>
                   <a:txBody>
                     <a:bodyPr/>
@@ -11823,7 +11521,7 @@
                     <a:p>
                       <a:pPr algn="ctr"/>
                       <a:r>
-                        <a:rPr sz="1300" b="0">
+                        <a:rPr sz="1400" b="0">
                           <a:solidFill>
                             <a:srgbClr val="0B0B0B"/>
                           </a:solidFill>
@@ -11846,7 +11544,7 @@
                     <a:p>
                       <a:pPr algn="ctr"/>
                       <a:r>
-                        <a:rPr sz="1300" b="0">
+                        <a:rPr sz="1400" b="0">
                           <a:solidFill>
                             <a:srgbClr val="0B0B0B"/>
                           </a:solidFill>
@@ -11869,7 +11567,7 @@
                     <a:p>
                       <a:pPr algn="ctr"/>
                       <a:r>
-                        <a:rPr sz="1300" b="0">
+                        <a:rPr sz="1400" b="0">
                           <a:solidFill>
                             <a:srgbClr val="0B0B0B"/>
                           </a:solidFill>
@@ -11898,8 +11596,8 @@
         </p:nvSpPr>
         <p:spPr>
           <a:xfrm>
-            <a:off x="6236208" y="4480560"/>
-            <a:ext cx="5120640" cy="1097280"/>
+            <a:off x="6236208" y="4526280"/>
+            <a:ext cx="5120640" cy="1005840"/>
           </a:xfrm>
           <a:prstGeom prst="rect">
             <a:avLst/>
@@ -11926,13 +11624,13 @@
               <a:buChar char="•"/>
             </a:pPr>
             <a:r>
-              <a:rPr sz="1350" b="0" i="0">
+              <a:rPr sz="1400" b="0" i="0">
                 <a:solidFill>
                   <a:srgbClr val="52514E"/>
                 </a:solidFill>
                 <a:latin typeface="Arial"/>
               </a:rPr>
-              <a:t>Już w 3 zbiorach próby: zwykły KFold dał fold bez klasy rzadkiej (2 raz), stratyfikowany — 0 razy.</a:t>
+              <a:t>W 3 zbiorach próby: foldy bez klasy rzadkiej — KFold 2, Stratified 0.</a:t>
             </a:r>
           </a:p>
         </p:txBody>
